--- a/public/fun/pack/pptx/family/가족소개_17_아이와함께_해바라기담장.pptx
+++ b/public/fun/pack/pptx/family/가족소개_17_아이와함께_해바라기담장.pptx
@@ -3347,7 +3347,7 @@
             <a:r>
               <a:rPr sz="3600" b="1" i="0">
                 <a:solidFill>
-                  <a:srgbClr val="6E570C"/>
+                  <a:srgbClr val="115F25"/>
                 </a:solidFill>
               </a:rPr>
               <a:t>우리 가족을 소개합니다</a:t>
@@ -3385,7 +3385,7 @@
             <a:r>
               <a:rPr sz="1700" b="0" i="1">
                 <a:solidFill>
-                  <a:srgbClr val="6E570C"/>
+                  <a:srgbClr val="115F25"/>
                 </a:solidFill>
               </a:rPr>
               <a:t>해바라기보다 키가 큰 아이</a:t>
@@ -3445,7 +3445,7 @@
     <p:bg>
       <p:bgPr>
         <a:solidFill>
-          <a:srgbClr val="CAA016"/>
+          <a:srgbClr val="26C54E"/>
         </a:solidFill>
         <a:effectLst/>
       </p:bgPr>
@@ -3518,7 +3518,7 @@
             <a:r>
               <a:rPr sz="3000" b="1" i="0">
                 <a:solidFill>
-                  <a:srgbClr val="6E570C"/>
+                  <a:srgbClr val="115F25"/>
                 </a:solidFill>
               </a:rPr>
               <a:t>가족 구성원</a:t>
@@ -3541,11 +3541,11 @@
             <a:avLst/>
           </a:prstGeom>
           <a:solidFill>
-            <a:srgbClr val="FAEEC6"/>
+            <a:srgbClr val="D1FADC"/>
           </a:solidFill>
           <a:ln w="19050">
             <a:solidFill>
-              <a:srgbClr val="CAA016"/>
+              <a:srgbClr val="26C54E"/>
             </a:solidFill>
             <a:prstDash val="dash"/>
           </a:ln>
@@ -3564,7 +3564,7 @@
             <a:r>
               <a:rPr sz="1200" b="0" i="0">
                 <a:solidFill>
-                  <a:srgbClr val="6E570C"/>
+                  <a:srgbClr val="115F25"/>
                 </a:solidFill>
               </a:rPr>
               <a:t>사진</a:t>
@@ -3602,7 +3602,7 @@
             <a:r>
               <a:rPr sz="1600" b="1" i="0">
                 <a:solidFill>
-                  <a:srgbClr val="6E570C"/>
+                  <a:srgbClr val="115F25"/>
                 </a:solidFill>
               </a:rPr>
               <a:t>아빠</a:t>
@@ -3693,11 +3693,11 @@
             <a:avLst/>
           </a:prstGeom>
           <a:solidFill>
-            <a:srgbClr val="FAEEC6"/>
+            <a:srgbClr val="D1FADC"/>
           </a:solidFill>
           <a:ln w="19050">
             <a:solidFill>
-              <a:srgbClr val="CAA016"/>
+              <a:srgbClr val="26C54E"/>
             </a:solidFill>
             <a:prstDash val="dash"/>
           </a:ln>
@@ -3716,7 +3716,7 @@
             <a:r>
               <a:rPr sz="1200" b="0" i="0">
                 <a:solidFill>
-                  <a:srgbClr val="6E570C"/>
+                  <a:srgbClr val="115F25"/>
                 </a:solidFill>
               </a:rPr>
               <a:t>사진</a:t>
@@ -3754,7 +3754,7 @@
             <a:r>
               <a:rPr sz="1600" b="1" i="0">
                 <a:solidFill>
-                  <a:srgbClr val="6E570C"/>
+                  <a:srgbClr val="115F25"/>
                 </a:solidFill>
               </a:rPr>
               <a:t>엄마</a:t>
@@ -3845,11 +3845,11 @@
             <a:avLst/>
           </a:prstGeom>
           <a:solidFill>
-            <a:srgbClr val="FAEEC6"/>
+            <a:srgbClr val="D1FADC"/>
           </a:solidFill>
           <a:ln w="19050">
             <a:solidFill>
-              <a:srgbClr val="CAA016"/>
+              <a:srgbClr val="26C54E"/>
             </a:solidFill>
             <a:prstDash val="dash"/>
           </a:ln>
@@ -3868,7 +3868,7 @@
             <a:r>
               <a:rPr sz="1200" b="0" i="0">
                 <a:solidFill>
-                  <a:srgbClr val="6E570C"/>
+                  <a:srgbClr val="115F25"/>
                 </a:solidFill>
               </a:rPr>
               <a:t>사진</a:t>
@@ -3906,7 +3906,7 @@
             <a:r>
               <a:rPr sz="1600" b="1" i="0">
                 <a:solidFill>
-                  <a:srgbClr val="6E570C"/>
+                  <a:srgbClr val="115F25"/>
                 </a:solidFill>
               </a:rPr>
               <a:t>첫째</a:t>
@@ -3997,11 +3997,11 @@
             <a:avLst/>
           </a:prstGeom>
           <a:solidFill>
-            <a:srgbClr val="FAEEC6"/>
+            <a:srgbClr val="D1FADC"/>
           </a:solidFill>
           <a:ln w="19050">
             <a:solidFill>
-              <a:srgbClr val="CAA016"/>
+              <a:srgbClr val="26C54E"/>
             </a:solidFill>
             <a:prstDash val="dash"/>
           </a:ln>
@@ -4020,7 +4020,7 @@
             <a:r>
               <a:rPr sz="1200" b="0" i="0">
                 <a:solidFill>
-                  <a:srgbClr val="6E570C"/>
+                  <a:srgbClr val="115F25"/>
                 </a:solidFill>
               </a:rPr>
               <a:t>사진</a:t>
@@ -4058,7 +4058,7 @@
             <a:r>
               <a:rPr sz="1600" b="1" i="0">
                 <a:solidFill>
-                  <a:srgbClr val="6E570C"/>
+                  <a:srgbClr val="115F25"/>
                 </a:solidFill>
               </a:rPr>
               <a:t>둘째</a:t>
@@ -4148,7 +4148,7 @@
     <p:bg>
       <p:bgPr>
         <a:solidFill>
-          <a:srgbClr val="CAA016"/>
+          <a:srgbClr val="26C54E"/>
         </a:solidFill>
         <a:effectLst/>
       </p:bgPr>
@@ -4221,7 +4221,7 @@
             <a:r>
               <a:rPr sz="3000" b="1" i="0">
                 <a:solidFill>
-                  <a:srgbClr val="6E570C"/>
+                  <a:srgbClr val="115F25"/>
                 </a:solidFill>
               </a:rPr>
               <a:t>우리 가족 이야기</a:t>
@@ -4244,7 +4244,7 @@
             <a:avLst/>
           </a:prstGeom>
           <a:solidFill>
-            <a:srgbClr val="FAEEC6"/>
+            <a:srgbClr val="D1FADC"/>
           </a:solidFill>
           <a:ln>
             <a:noFill/>
@@ -4273,7 +4273,7 @@
             <a:avLst/>
           </a:prstGeom>
           <a:solidFill>
-            <a:srgbClr val="CAA016"/>
+            <a:srgbClr val="26C54E"/>
           </a:solidFill>
           <a:ln w="38100">
             <a:solidFill>
@@ -4319,7 +4319,7 @@
             <a:r>
               <a:rPr sz="1600" b="1" i="0">
                 <a:solidFill>
-                  <a:srgbClr val="CAA016"/>
+                  <a:srgbClr val="26C54E"/>
                 </a:solidFill>
               </a:rPr>
               <a:t>가족이 된 날</a:t>
@@ -4357,7 +4357,7 @@
             <a:r>
               <a:rPr sz="1800" b="1" i="0">
                 <a:solidFill>
-                  <a:srgbClr val="6E570C"/>
+                  <a:srgbClr val="115F25"/>
                 </a:solidFill>
               </a:rPr>
               <a:t>우리의 시작</a:t>
@@ -4418,7 +4418,7 @@
             <a:avLst/>
           </a:prstGeom>
           <a:solidFill>
-            <a:srgbClr val="CAA016"/>
+            <a:srgbClr val="26C54E"/>
           </a:solidFill>
           <a:ln w="38100">
             <a:solidFill>
@@ -4464,7 +4464,7 @@
             <a:r>
               <a:rPr sz="1600" b="1" i="0">
                 <a:solidFill>
-                  <a:srgbClr val="CAA016"/>
+                  <a:srgbClr val="26C54E"/>
                 </a:solidFill>
               </a:rPr>
               <a:t>아이가 태어난 날</a:t>
@@ -4502,7 +4502,7 @@
             <a:r>
               <a:rPr sz="1800" b="1" i="0">
                 <a:solidFill>
-                  <a:srgbClr val="6E570C"/>
+                  <a:srgbClr val="115F25"/>
                 </a:solidFill>
               </a:rPr>
               <a:t>새 식구</a:t>
@@ -4563,7 +4563,7 @@
             <a:avLst/>
           </a:prstGeom>
           <a:solidFill>
-            <a:srgbClr val="CAA016"/>
+            <a:srgbClr val="26C54E"/>
           </a:solidFill>
           <a:ln w="38100">
             <a:solidFill>
@@ -4609,7 +4609,7 @@
             <a:r>
               <a:rPr sz="1600" b="1" i="0">
                 <a:solidFill>
-                  <a:srgbClr val="CAA016"/>
+                  <a:srgbClr val="26C54E"/>
                 </a:solidFill>
               </a:rPr>
               <a:t>첫 가족 여행</a:t>
@@ -4647,7 +4647,7 @@
             <a:r>
               <a:rPr sz="1800" b="1" i="0">
                 <a:solidFill>
-                  <a:srgbClr val="6E570C"/>
+                  <a:srgbClr val="115F25"/>
                 </a:solidFill>
               </a:rPr>
               <a:t>함께 떠난 길</a:t>
@@ -4708,7 +4708,7 @@
             <a:avLst/>
           </a:prstGeom>
           <a:solidFill>
-            <a:srgbClr val="CAA016"/>
+            <a:srgbClr val="26C54E"/>
           </a:solidFill>
           <a:ln w="38100">
             <a:solidFill>
@@ -4754,7 +4754,7 @@
             <a:r>
               <a:rPr sz="1600" b="1" i="0">
                 <a:solidFill>
-                  <a:srgbClr val="CAA016"/>
+                  <a:srgbClr val="26C54E"/>
                 </a:solidFill>
               </a:rPr>
               <a:t>지금</a:t>
@@ -4792,7 +4792,7 @@
             <a:r>
               <a:rPr sz="1800" b="1" i="0">
                 <a:solidFill>
-                  <a:srgbClr val="6E570C"/>
+                  <a:srgbClr val="115F25"/>
                 </a:solidFill>
               </a:rPr>
               <a:t>오늘의 우리</a:t>
@@ -4852,7 +4852,7 @@
     <p:bg>
       <p:bgPr>
         <a:solidFill>
-          <a:srgbClr val="CAA016"/>
+          <a:srgbClr val="26C54E"/>
         </a:solidFill>
         <a:effectLst/>
       </p:bgPr>
@@ -4925,7 +4925,7 @@
             <a:r>
               <a:rPr sz="3000" b="1" i="0">
                 <a:solidFill>
-                  <a:srgbClr val="6E570C"/>
+                  <a:srgbClr val="115F25"/>
                 </a:solidFill>
               </a:rPr>
               <a:t>우리 가족의 약속</a:t>
@@ -4950,11 +4950,11 @@
             </a:avLst>
           </a:prstGeom>
           <a:solidFill>
-            <a:srgbClr val="FDF9ED"/>
+            <a:srgbClr val="EEFCF1"/>
           </a:solidFill>
           <a:ln w="12700">
             <a:solidFill>
-              <a:srgbClr val="FAEEC6"/>
+              <a:srgbClr val="D1FADC"/>
             </a:solidFill>
           </a:ln>
         </p:spPr>
@@ -4981,7 +4981,7 @@
             <a:avLst/>
           </a:prstGeom>
           <a:solidFill>
-            <a:srgbClr val="CAA016"/>
+            <a:srgbClr val="26C54E"/>
           </a:solidFill>
           <a:ln>
             <a:noFill/>
@@ -5039,7 +5039,7 @@
             <a:r>
               <a:rPr sz="1800" b="1" i="0">
                 <a:solidFill>
-                  <a:srgbClr val="6E570C"/>
+                  <a:srgbClr val="115F25"/>
                 </a:solidFill>
               </a:rPr>
               <a:t>약속 1</a:t>
@@ -5102,11 +5102,11 @@
             </a:avLst>
           </a:prstGeom>
           <a:solidFill>
-            <a:srgbClr val="FDF9ED"/>
+            <a:srgbClr val="EEFCF1"/>
           </a:solidFill>
           <a:ln w="12700">
             <a:solidFill>
-              <a:srgbClr val="FAEEC6"/>
+              <a:srgbClr val="D1FADC"/>
             </a:solidFill>
           </a:ln>
         </p:spPr>
@@ -5133,7 +5133,7 @@
             <a:avLst/>
           </a:prstGeom>
           <a:solidFill>
-            <a:srgbClr val="CAA016"/>
+            <a:srgbClr val="26C54E"/>
           </a:solidFill>
           <a:ln>
             <a:noFill/>
@@ -5191,7 +5191,7 @@
             <a:r>
               <a:rPr sz="1800" b="1" i="0">
                 <a:solidFill>
-                  <a:srgbClr val="6E570C"/>
+                  <a:srgbClr val="115F25"/>
                 </a:solidFill>
               </a:rPr>
               <a:t>약속 2</a:t>
@@ -5254,11 +5254,11 @@
             </a:avLst>
           </a:prstGeom>
           <a:solidFill>
-            <a:srgbClr val="FDF9ED"/>
+            <a:srgbClr val="EEFCF1"/>
           </a:solidFill>
           <a:ln w="12700">
             <a:solidFill>
-              <a:srgbClr val="FAEEC6"/>
+              <a:srgbClr val="D1FADC"/>
             </a:solidFill>
           </a:ln>
         </p:spPr>
@@ -5285,7 +5285,7 @@
             <a:avLst/>
           </a:prstGeom>
           <a:solidFill>
-            <a:srgbClr val="CAA016"/>
+            <a:srgbClr val="26C54E"/>
           </a:solidFill>
           <a:ln>
             <a:noFill/>
@@ -5343,7 +5343,7 @@
             <a:r>
               <a:rPr sz="1800" b="1" i="0">
                 <a:solidFill>
-                  <a:srgbClr val="6E570C"/>
+                  <a:srgbClr val="115F25"/>
                 </a:solidFill>
               </a:rPr>
               <a:t>약속 3</a:t>
@@ -5403,7 +5403,7 @@
     <p:bg>
       <p:bgPr>
         <a:solidFill>
-          <a:srgbClr val="CAA016"/>
+          <a:srgbClr val="26C54E"/>
         </a:solidFill>
         <a:effectLst/>
       </p:bgPr>
@@ -5476,7 +5476,7 @@
             <a:r>
               <a:rPr sz="3000" b="1" i="0">
                 <a:solidFill>
-                  <a:srgbClr val="6E570C"/>
+                  <a:srgbClr val="115F25"/>
                 </a:solidFill>
               </a:rPr>
               <a:t>가족 사진</a:t>
@@ -5501,11 +5501,11 @@
             </a:avLst>
           </a:prstGeom>
           <a:solidFill>
-            <a:srgbClr val="FAEEC6"/>
+            <a:srgbClr val="D1FADC"/>
           </a:solidFill>
           <a:ln w="19050">
             <a:solidFill>
-              <a:srgbClr val="CAA016"/>
+              <a:srgbClr val="26C54E"/>
             </a:solidFill>
             <a:prstDash val="dash"/>
           </a:ln>
@@ -5524,7 +5524,7 @@
             <a:r>
               <a:rPr sz="1200" b="0" i="0">
                 <a:solidFill>
-                  <a:srgbClr val="6E570C"/>
+                  <a:srgbClr val="115F25"/>
                 </a:solidFill>
               </a:rPr>
               <a:t>사진 1</a:t>
@@ -5549,11 +5549,11 @@
             </a:avLst>
           </a:prstGeom>
           <a:solidFill>
-            <a:srgbClr val="FAEEC6"/>
+            <a:srgbClr val="D1FADC"/>
           </a:solidFill>
           <a:ln w="19050">
             <a:solidFill>
-              <a:srgbClr val="CAA016"/>
+              <a:srgbClr val="26C54E"/>
             </a:solidFill>
             <a:prstDash val="dash"/>
           </a:ln>
@@ -5572,7 +5572,7 @@
             <a:r>
               <a:rPr sz="1200" b="0" i="0">
                 <a:solidFill>
-                  <a:srgbClr val="6E570C"/>
+                  <a:srgbClr val="115F25"/>
                 </a:solidFill>
               </a:rPr>
               <a:t>사진 2</a:t>
@@ -5597,11 +5597,11 @@
             </a:avLst>
           </a:prstGeom>
           <a:solidFill>
-            <a:srgbClr val="FAEEC6"/>
+            <a:srgbClr val="D1FADC"/>
           </a:solidFill>
           <a:ln w="19050">
             <a:solidFill>
-              <a:srgbClr val="CAA016"/>
+              <a:srgbClr val="26C54E"/>
             </a:solidFill>
             <a:prstDash val="dash"/>
           </a:ln>
@@ -5620,7 +5620,7 @@
             <a:r>
               <a:rPr sz="1200" b="0" i="0">
                 <a:solidFill>
-                  <a:srgbClr val="6E570C"/>
+                  <a:srgbClr val="115F25"/>
                 </a:solidFill>
               </a:rPr>
               <a:t>사진 3</a:t>
@@ -5645,11 +5645,11 @@
             </a:avLst>
           </a:prstGeom>
           <a:solidFill>
-            <a:srgbClr val="FAEEC6"/>
+            <a:srgbClr val="D1FADC"/>
           </a:solidFill>
           <a:ln w="19050">
             <a:solidFill>
-              <a:srgbClr val="CAA016"/>
+              <a:srgbClr val="26C54E"/>
             </a:solidFill>
             <a:prstDash val="dash"/>
           </a:ln>
@@ -5668,7 +5668,7 @@
             <a:r>
               <a:rPr sz="1200" b="0" i="0">
                 <a:solidFill>
-                  <a:srgbClr val="6E570C"/>
+                  <a:srgbClr val="115F25"/>
                 </a:solidFill>
               </a:rPr>
               <a:t>사진 4</a:t>
@@ -5693,11 +5693,11 @@
             </a:avLst>
           </a:prstGeom>
           <a:solidFill>
-            <a:srgbClr val="FAEEC6"/>
+            <a:srgbClr val="D1FADC"/>
           </a:solidFill>
           <a:ln w="19050">
             <a:solidFill>
-              <a:srgbClr val="CAA016"/>
+              <a:srgbClr val="26C54E"/>
             </a:solidFill>
             <a:prstDash val="dash"/>
           </a:ln>
@@ -5716,7 +5716,7 @@
             <a:r>
               <a:rPr sz="1200" b="0" i="0">
                 <a:solidFill>
-                  <a:srgbClr val="6E570C"/>
+                  <a:srgbClr val="115F25"/>
                 </a:solidFill>
               </a:rPr>
               <a:t>사진 5</a:t>
@@ -5741,11 +5741,11 @@
             </a:avLst>
           </a:prstGeom>
           <a:solidFill>
-            <a:srgbClr val="FAEEC6"/>
+            <a:srgbClr val="D1FADC"/>
           </a:solidFill>
           <a:ln w="19050">
             <a:solidFill>
-              <a:srgbClr val="CAA016"/>
+              <a:srgbClr val="26C54E"/>
             </a:solidFill>
             <a:prstDash val="dash"/>
           </a:ln>
@@ -5764,7 +5764,7 @@
             <a:r>
               <a:rPr sz="1200" b="0" i="0">
                 <a:solidFill>
-                  <a:srgbClr val="6E570C"/>
+                  <a:srgbClr val="115F25"/>
                 </a:solidFill>
               </a:rPr>
               <a:t>사진 6</a:t>
@@ -5844,7 +5844,7 @@
             <a:r>
               <a:rPr sz="3600" b="1" i="0">
                 <a:solidFill>
-                  <a:srgbClr val="6E570C"/>
+                  <a:srgbClr val="115F25"/>
                 </a:solidFill>
               </a:rPr>
               <a:t>우리 가족 소개를 마칩니다</a:t>
@@ -5882,7 +5882,7 @@
             <a:r>
               <a:rPr sz="1700" b="0" i="1">
                 <a:solidFill>
-                  <a:srgbClr val="6E570C"/>
+                  <a:srgbClr val="115F25"/>
                 </a:solidFill>
               </a:rPr>
               <a:t>읽어 주셔서 고맙습니다</a:t>
@@ -5947,34 +5947,34 @@
         <a:sysClr val="window" lastClr="FFFFFF"/>
       </a:lt1>
       <a:dk2>
-        <a:srgbClr val="6E570C"/>
+        <a:srgbClr val="115F25"/>
       </a:dk2>
       <a:lt2>
-        <a:srgbClr val="FDF9ED"/>
+        <a:srgbClr val="EEFCF1"/>
       </a:lt2>
       <a:accent1>
-        <a:srgbClr val="CAA016"/>
+        <a:srgbClr val="26C54E"/>
       </a:accent1>
       <a:accent2>
-        <a:srgbClr val="3B7A91"/>
+        <a:srgbClr val="209DB6"/>
       </a:accent2>
       <a:accent3>
-        <a:srgbClr val="6E570C"/>
+        <a:srgbClr val="115F25"/>
       </a:accent3>
       <a:accent4>
-        <a:srgbClr val="FAEEC6"/>
+        <a:srgbClr val="D1FADC"/>
       </a:accent4>
       <a:accent5>
-        <a:srgbClr val="828D54"/>
+        <a:srgbClr val="23B182"/>
       </a:accent5>
       <a:accent6>
-        <a:srgbClr val="A89A6D"/>
+        <a:srgbClr val="709F7C"/>
       </a:accent6>
       <a:hlink>
-        <a:srgbClr val="CAA016"/>
+        <a:srgbClr val="26C54E"/>
       </a:hlink>
       <a:folHlink>
-        <a:srgbClr val="6E570C"/>
+        <a:srgbClr val="115F25"/>
       </a:folHlink>
     </a:clrScheme>
     <a:fontScheme name="Office">

--- a/public/fun/pack/pptx/family/가족소개_17_아이와함께_해바라기담장.pptx
+++ b/public/fun/pack/pptx/family/가족소개_17_아이와함께_해바라기담장.pptx
@@ -3286,6 +3286,14 @@
 <file path=ppt/slides/slide1.xml><?xml version="1.0" encoding="utf-8"?>
 <p:sld xmlns:a="http://schemas.openxmlformats.org/drawingml/2006/main" xmlns:p="http://schemas.openxmlformats.org/presentationml/2006/main" xmlns:r="http://schemas.openxmlformats.org/officeDocument/2006/relationships">
   <p:cSld>
+    <p:bg>
+      <p:bgPr>
+        <a:solidFill>
+          <a:srgbClr val="FDF8EA"/>
+        </a:solidFill>
+        <a:effectLst/>
+      </p:bgPr>
+    </p:bg>
     <p:spTree>
       <p:nvGrpSpPr>
         <p:cNvPr id="1" name=""/>
@@ -3293,30 +3301,116 @@
         <p:nvPr/>
       </p:nvGrpSpPr>
       <p:grpSpPr/>
-      <p:pic>
-        <p:nvPicPr>
-          <p:cNvPr id="3" name="표지 그림" descr="family-17.jpg"/>
-          <p:cNvPicPr>
-            <a:picLocks noChangeAspect="1"/>
-          </p:cNvPicPr>
-          <p:nvPr/>
-        </p:nvPicPr>
-        <p:blipFill>
-          <a:blip r:embed="rId2"/>
-          <a:stretch>
-            <a:fillRect/>
-          </a:stretch>
-        </p:blipFill>
+      <p:sp>
+        <p:nvSpPr>
+          <p:cNvPr id="3" name="사진 자리"/>
+          <p:cNvSpPr/>
+          <p:nvPr/>
+        </p:nvSpPr>
         <p:spPr>
           <a:xfrm>
             <a:off x="0" y="0"/>
-            <a:ext cx="12191695" cy="6858000"/>
+            <a:ext cx="4389010" cy="6858000"/>
           </a:xfrm>
           <a:prstGeom prst="rect">
             <a:avLst/>
           </a:prstGeom>
-        </p:spPr>
-      </p:pic>
+          <a:solidFill>
+            <a:srgbClr val="F3E1A5"/>
+          </a:solidFill>
+          <a:ln>
+            <a:noFill/>
+          </a:ln>
+        </p:spPr>
+        <p:txBody>
+          <a:bodyPr rtlCol="0" anchor="ctr" wrap="square" lIns="54864" rIns="54864" tIns="27432" bIns="27432">
+            <a:noAutofit/>
+          </a:bodyPr>
+          <a:lstStyle/>
+          <a:p>
+            <a:pPr algn="ctr">
+              <a:lnSpc>
+                <a:spcPct val="100000"/>
+              </a:lnSpc>
+            </a:pPr>
+            <a:r>
+              <a:rPr sz="1400" b="0" i="0">
+                <a:solidFill>
+                  <a:srgbClr val="494127"/>
+                </a:solidFill>
+              </a:rPr>
+              <a:t>사진을 넣어 주세요</a:t>
+            </a:r>
+          </a:p>
+        </p:txBody>
+      </p:sp>
+      <p:sp>
+        <p:nvSpPr>
+          <p:cNvPr id="4" name="장식"/>
+          <p:cNvSpPr/>
+          <p:nvPr/>
+        </p:nvSpPr>
+        <p:spPr>
+          <a:xfrm>
+            <a:off x="365750" y="365760"/>
+            <a:ext cx="3657508" cy="6126480"/>
+          </a:xfrm>
+          <a:prstGeom prst="rect">
+            <a:avLst/>
+          </a:prstGeom>
+          <a:noFill/>
+          <a:ln w="9525">
+            <a:solidFill>
+              <a:srgbClr val="26231F"/>
+            </a:solidFill>
+          </a:ln>
+        </p:spPr>
+        <p:txBody>
+          <a:bodyPr rtlCol="0" anchor="ctr"/>
+          <a:lstStyle/>
+          <a:p>
+            <a:pPr algn="ctr"/>
+          </a:p>
+        </p:txBody>
+      </p:sp>
+      <p:sp>
+        <p:nvSpPr>
+          <p:cNvPr id="5" name="라벨"/>
+          <p:cNvSpPr txBox="1"/>
+          <p:nvPr/>
+        </p:nvSpPr>
+        <p:spPr>
+          <a:xfrm>
+            <a:off x="6827349" y="2148840"/>
+            <a:ext cx="4632844" cy="274320"/>
+          </a:xfrm>
+          <a:prstGeom prst="rect">
+            <a:avLst/>
+          </a:prstGeom>
+          <a:noFill/>
+        </p:spPr>
+        <p:txBody>
+          <a:bodyPr wrap="square" lIns="54864" rIns="54864" tIns="27432" bIns="27432" anchor="t">
+            <a:noAutofit/>
+          </a:bodyPr>
+          <a:lstStyle/>
+          <a:p>
+            <a:pPr algn="l">
+              <a:lnSpc>
+                <a:spcPct val="115000"/>
+              </a:lnSpc>
+            </a:pPr>
+            <a:r>
+              <a:rPr sz="1000" b="1" i="0" spc="250">
+                <a:solidFill>
+                  <a:srgbClr val="26231F"/>
+                </a:solidFill>
+              </a:rPr>
+              <a:t>FAMILY ALBUM</a:t>
+            </a:r>
+          </a:p>
+        </p:txBody>
+      </p:sp>
       <p:sp>
         <p:nvSpPr>
           <p:cNvPr id="2" name="Title 1"/>
@@ -3329,8 +3423,8 @@
         </p:nvSpPr>
         <p:spPr>
           <a:xfrm>
-            <a:off x="853418" y="2057400"/>
-            <a:ext cx="6095847" cy="1554480"/>
+            <a:off x="6827349" y="2606040"/>
+            <a:ext cx="4632844" cy="1188720"/>
           </a:xfrm>
         </p:spPr>
         <p:txBody>
@@ -3345,9 +3439,9 @@
               </a:lnSpc>
             </a:pPr>
             <a:r>
-              <a:rPr sz="3600" b="1" i="0">
-                <a:solidFill>
-                  <a:srgbClr val="115F25"/>
+              <a:rPr sz="4000" b="1" i="0">
+                <a:solidFill>
+                  <a:srgbClr val="26231F"/>
                 </a:solidFill>
               </a:rPr>
               <a:t>우리 가족을 소개합니다</a:t>
@@ -3357,14 +3451,14 @@
       </p:sp>
       <p:sp>
         <p:nvSpPr>
-          <p:cNvPr id="4" name="한 줄 문구"/>
+          <p:cNvPr id="6" name="한 줄 문구"/>
           <p:cNvSpPr txBox="1"/>
           <p:nvPr/>
         </p:nvSpPr>
         <p:spPr>
           <a:xfrm>
-            <a:off x="853418" y="3749039"/>
-            <a:ext cx="6095847" cy="822960"/>
+            <a:off x="6827349" y="3886200"/>
+            <a:ext cx="4632844" cy="822960"/>
           </a:xfrm>
           <a:prstGeom prst="rect">
             <a:avLst/>
@@ -3383,9 +3477,9 @@
               </a:lnSpc>
             </a:pPr>
             <a:r>
-              <a:rPr sz="1700" b="0" i="1">
-                <a:solidFill>
-                  <a:srgbClr val="115F25"/>
+              <a:rPr sz="1700" b="0" i="0">
+                <a:solidFill>
+                  <a:srgbClr val="26231F"/>
                 </a:solidFill>
               </a:rPr>
               <a:t>해바라기보다 키가 큰 아이</a:t>
@@ -3395,14 +3489,14 @@
       </p:sp>
       <p:sp>
         <p:nvSpPr>
-          <p:cNvPr id="5" name="안내 문구"/>
+          <p:cNvPr id="7" name="안내 문구"/>
           <p:cNvSpPr txBox="1"/>
           <p:nvPr/>
         </p:nvSpPr>
         <p:spPr>
           <a:xfrm>
-            <a:off x="853418" y="4617720"/>
-            <a:ext cx="6095847" cy="914400"/>
+            <a:off x="6827349" y="4754880"/>
+            <a:ext cx="4632844" cy="914400"/>
           </a:xfrm>
           <a:prstGeom prst="rect">
             <a:avLst/>
@@ -3423,10 +3517,10 @@
             <a:r>
               <a:rPr sz="1400" b="0" i="0">
                 <a:solidFill>
-                  <a:srgbClr val="666666"/>
+                  <a:srgbClr val="26231F"/>
                 </a:solidFill>
               </a:rPr>
-              <a:t>아이와 함께 · 2027. 00. 00</a:t>
+              <a:t>아이와 함께 · 날짜 입력</a:t>
             </a:r>
           </a:p>
         </p:txBody>
@@ -3445,7 +3539,7 @@
     <p:bg>
       <p:bgPr>
         <a:solidFill>
-          <a:srgbClr val="26C54E"/>
+          <a:srgbClr val="FFFFFF"/>
         </a:solidFill>
         <a:effectLst/>
       </p:bgPr>
@@ -3465,13 +3559,78 @@
         </p:nvSpPr>
         <p:spPr>
           <a:xfrm>
-            <a:off x="274320" y="274320"/>
-            <a:ext cx="11643055" cy="6309360"/>
-          </a:xfrm>
-          <a:prstGeom prst="roundRect">
-            <a:avLst>
-              <a:gd name="adj" fmla="val 3500"/>
-            </a:avLst>
+            <a:off x="10180015" y="-1645920"/>
+            <a:ext cx="3474720" cy="3474720"/>
+          </a:xfrm>
+          <a:prstGeom prst="ellipse">
+            <a:avLst/>
+          </a:prstGeom>
+          <a:solidFill>
+            <a:srgbClr val="F3E1A5"/>
+          </a:solidFill>
+          <a:ln>
+            <a:noFill/>
+          </a:ln>
+        </p:spPr>
+        <p:txBody>
+          <a:bodyPr rtlCol="0" anchor="ctr"/>
+          <a:lstStyle/>
+          <a:p>
+            <a:pPr algn="ctr"/>
+          </a:p>
+        </p:txBody>
+      </p:sp>
+      <p:sp>
+        <p:nvSpPr>
+          <p:cNvPr id="4" name="상단 라벨"/>
+          <p:cNvSpPr txBox="1"/>
+          <p:nvPr/>
+        </p:nvSpPr>
+        <p:spPr>
+          <a:xfrm>
+            <a:off x="640080" y="274320"/>
+            <a:ext cx="5486400" cy="274320"/>
+          </a:xfrm>
+          <a:prstGeom prst="rect">
+            <a:avLst/>
+          </a:prstGeom>
+          <a:noFill/>
+        </p:spPr>
+        <p:txBody>
+          <a:bodyPr wrap="square" lIns="54864" rIns="54864" tIns="27432" bIns="27432" anchor="ctr">
+            <a:noAutofit/>
+          </a:bodyPr>
+          <a:lstStyle/>
+          <a:p>
+            <a:pPr algn="l">
+              <a:lnSpc>
+                <a:spcPct val="115000"/>
+              </a:lnSpc>
+            </a:pPr>
+            <a:r>
+              <a:rPr sz="900" b="1" i="0" spc="250">
+                <a:solidFill>
+                  <a:srgbClr val="26231F"/>
+                </a:solidFill>
+              </a:rPr>
+              <a:t>FAMILY ALBUM</a:t>
+            </a:r>
+          </a:p>
+        </p:txBody>
+      </p:sp>
+      <p:sp>
+        <p:nvSpPr>
+          <p:cNvPr id="5" name="포인트"/>
+          <p:cNvSpPr/>
+          <p:nvPr/>
+        </p:nvSpPr>
+        <p:spPr>
+          <a:xfrm>
+            <a:off x="11048695" y="502919"/>
+            <a:ext cx="274320" cy="274320"/>
+          </a:xfrm>
+          <a:prstGeom prst="donut">
+            <a:avLst/>
           </a:prstGeom>
           <a:solidFill>
             <a:srgbClr val="FFFFFF"/>
@@ -3500,8 +3659,8 @@
         </p:nvSpPr>
         <p:spPr>
           <a:xfrm>
-            <a:off x="731520" y="548640"/>
-            <a:ext cx="9448495" cy="868680"/>
+            <a:off x="640080" y="658368"/>
+            <a:ext cx="9082735" cy="868680"/>
           </a:xfrm>
         </p:spPr>
         <p:txBody>
@@ -3518,7 +3677,7 @@
             <a:r>
               <a:rPr sz="3000" b="1" i="0">
                 <a:solidFill>
-                  <a:srgbClr val="115F25"/>
+                  <a:srgbClr val="26231F"/>
                 </a:solidFill>
               </a:rPr>
               <a:t>가족 구성원</a:t>
@@ -3528,25 +3687,23 @@
       </p:sp>
       <p:sp>
         <p:nvSpPr>
-          <p:cNvPr id="4" name="사진 자리"/>
+          <p:cNvPr id="6" name="사진 자리"/>
           <p:cNvSpPr/>
           <p:nvPr/>
         </p:nvSpPr>
         <p:spPr>
           <a:xfrm>
-            <a:off x="868680" y="1600200"/>
-            <a:ext cx="2236393" cy="2236393"/>
+            <a:off x="777239" y="1783080"/>
+            <a:ext cx="2282113" cy="2282113"/>
           </a:xfrm>
           <a:prstGeom prst="ellipse">
             <a:avLst/>
           </a:prstGeom>
           <a:solidFill>
-            <a:srgbClr val="D1FADC"/>
+            <a:srgbClr val="FAF1D1"/>
           </a:solidFill>
           <a:ln w="19050">
-            <a:solidFill>
-              <a:srgbClr val="26C54E"/>
-            </a:solidFill>
+            <a:noFill/>
             <a:prstDash val="dash"/>
           </a:ln>
         </p:spPr>
@@ -3564,7 +3721,7 @@
             <a:r>
               <a:rPr sz="1200" b="0" i="0">
                 <a:solidFill>
-                  <a:srgbClr val="115F25"/>
+                  <a:srgbClr val="8E8780"/>
                 </a:solidFill>
               </a:rPr>
               <a:t>사진</a:t>
@@ -3574,14 +3731,14 @@
       </p:sp>
       <p:sp>
         <p:nvSpPr>
-          <p:cNvPr id="5" name="TextBox 4"/>
+          <p:cNvPr id="7" name="TextBox 6"/>
           <p:cNvSpPr txBox="1"/>
           <p:nvPr/>
         </p:nvSpPr>
         <p:spPr>
           <a:xfrm>
-            <a:off x="731520" y="3928033"/>
-            <a:ext cx="2510713" cy="411480"/>
+            <a:off x="640080" y="4156633"/>
+            <a:ext cx="2556433" cy="411480"/>
           </a:xfrm>
           <a:prstGeom prst="rect">
             <a:avLst/>
@@ -3602,7 +3759,7 @@
             <a:r>
               <a:rPr sz="1600" b="1" i="0">
                 <a:solidFill>
-                  <a:srgbClr val="115F25"/>
+                  <a:srgbClr val="494127"/>
                 </a:solidFill>
               </a:rPr>
               <a:t>아빠</a:t>
@@ -3612,14 +3769,14 @@
       </p:sp>
       <p:sp>
         <p:nvSpPr>
-          <p:cNvPr id="6" name="TextBox 5"/>
+          <p:cNvPr id="8" name="TextBox 7"/>
           <p:cNvSpPr txBox="1"/>
           <p:nvPr/>
         </p:nvSpPr>
         <p:spPr>
           <a:xfrm>
-            <a:off x="822960" y="4385233"/>
-            <a:ext cx="2327833" cy="1832686"/>
+            <a:off x="731519" y="4613833"/>
+            <a:ext cx="2373553" cy="1741246"/>
           </a:xfrm>
           <a:prstGeom prst="rect">
             <a:avLst/>
@@ -3680,25 +3837,23 @@
       </p:sp>
       <p:sp>
         <p:nvSpPr>
-          <p:cNvPr id="7" name="사진 자리"/>
+          <p:cNvPr id="9" name="사진 자리"/>
           <p:cNvSpPr/>
           <p:nvPr/>
         </p:nvSpPr>
         <p:spPr>
           <a:xfrm>
-            <a:off x="3607993" y="1600200"/>
-            <a:ext cx="2236393" cy="2236393"/>
+            <a:off x="3562273" y="1783080"/>
+            <a:ext cx="2282113" cy="2282113"/>
           </a:xfrm>
           <a:prstGeom prst="ellipse">
             <a:avLst/>
           </a:prstGeom>
           <a:solidFill>
-            <a:srgbClr val="D1FADC"/>
+            <a:srgbClr val="FAF1D1"/>
           </a:solidFill>
           <a:ln w="19050">
-            <a:solidFill>
-              <a:srgbClr val="26C54E"/>
-            </a:solidFill>
+            <a:noFill/>
             <a:prstDash val="dash"/>
           </a:ln>
         </p:spPr>
@@ -3716,7 +3871,7 @@
             <a:r>
               <a:rPr sz="1200" b="0" i="0">
                 <a:solidFill>
-                  <a:srgbClr val="115F25"/>
+                  <a:srgbClr val="8E8780"/>
                 </a:solidFill>
               </a:rPr>
               <a:t>사진</a:t>
@@ -3726,14 +3881,14 @@
       </p:sp>
       <p:sp>
         <p:nvSpPr>
-          <p:cNvPr id="8" name="TextBox 7"/>
+          <p:cNvPr id="10" name="TextBox 9"/>
           <p:cNvSpPr txBox="1"/>
           <p:nvPr/>
         </p:nvSpPr>
         <p:spPr>
           <a:xfrm>
-            <a:off x="3470833" y="3928033"/>
-            <a:ext cx="2510713" cy="411480"/>
+            <a:off x="3425113" y="4156633"/>
+            <a:ext cx="2556433" cy="411480"/>
           </a:xfrm>
           <a:prstGeom prst="rect">
             <a:avLst/>
@@ -3754,7 +3909,7 @@
             <a:r>
               <a:rPr sz="1600" b="1" i="0">
                 <a:solidFill>
-                  <a:srgbClr val="115F25"/>
+                  <a:srgbClr val="494127"/>
                 </a:solidFill>
               </a:rPr>
               <a:t>엄마</a:t>
@@ -3764,14 +3919,14 @@
       </p:sp>
       <p:sp>
         <p:nvSpPr>
-          <p:cNvPr id="9" name="TextBox 8"/>
+          <p:cNvPr id="11" name="TextBox 10"/>
           <p:cNvSpPr txBox="1"/>
           <p:nvPr/>
         </p:nvSpPr>
         <p:spPr>
           <a:xfrm>
-            <a:off x="3562273" y="4385233"/>
-            <a:ext cx="2327833" cy="1832686"/>
+            <a:off x="3516553" y="4613833"/>
+            <a:ext cx="2373553" cy="1741246"/>
           </a:xfrm>
           <a:prstGeom prst="rect">
             <a:avLst/>
@@ -3832,25 +3987,23 @@
       </p:sp>
       <p:sp>
         <p:nvSpPr>
-          <p:cNvPr id="10" name="사진 자리"/>
+          <p:cNvPr id="12" name="사진 자리"/>
           <p:cNvSpPr/>
           <p:nvPr/>
         </p:nvSpPr>
         <p:spPr>
           <a:xfrm>
-            <a:off x="6347307" y="1600200"/>
-            <a:ext cx="2236393" cy="2236393"/>
+            <a:off x="6347307" y="1783080"/>
+            <a:ext cx="2282113" cy="2282113"/>
           </a:xfrm>
           <a:prstGeom prst="ellipse">
             <a:avLst/>
           </a:prstGeom>
           <a:solidFill>
-            <a:srgbClr val="D1FADC"/>
+            <a:srgbClr val="FAF1D1"/>
           </a:solidFill>
           <a:ln w="19050">
-            <a:solidFill>
-              <a:srgbClr val="26C54E"/>
-            </a:solidFill>
+            <a:noFill/>
             <a:prstDash val="dash"/>
           </a:ln>
         </p:spPr>
@@ -3868,7 +4021,7 @@
             <a:r>
               <a:rPr sz="1200" b="0" i="0">
                 <a:solidFill>
-                  <a:srgbClr val="115F25"/>
+                  <a:srgbClr val="8E8780"/>
                 </a:solidFill>
               </a:rPr>
               <a:t>사진</a:t>
@@ -3878,14 +4031,14 @@
       </p:sp>
       <p:sp>
         <p:nvSpPr>
-          <p:cNvPr id="11" name="TextBox 10"/>
+          <p:cNvPr id="13" name="TextBox 12"/>
           <p:cNvSpPr txBox="1"/>
           <p:nvPr/>
         </p:nvSpPr>
         <p:spPr>
           <a:xfrm>
-            <a:off x="6210147" y="3928033"/>
-            <a:ext cx="2510713" cy="411480"/>
+            <a:off x="6210147" y="4156633"/>
+            <a:ext cx="2556433" cy="411480"/>
           </a:xfrm>
           <a:prstGeom prst="rect">
             <a:avLst/>
@@ -3906,7 +4059,7 @@
             <a:r>
               <a:rPr sz="1600" b="1" i="0">
                 <a:solidFill>
-                  <a:srgbClr val="115F25"/>
+                  <a:srgbClr val="494127"/>
                 </a:solidFill>
               </a:rPr>
               <a:t>첫째</a:t>
@@ -3916,14 +4069,14 @@
       </p:sp>
       <p:sp>
         <p:nvSpPr>
-          <p:cNvPr id="12" name="TextBox 11"/>
+          <p:cNvPr id="14" name="TextBox 13"/>
           <p:cNvSpPr txBox="1"/>
           <p:nvPr/>
         </p:nvSpPr>
         <p:spPr>
           <a:xfrm>
-            <a:off x="6301587" y="4385233"/>
-            <a:ext cx="2327833" cy="1832686"/>
+            <a:off x="6301587" y="4613833"/>
+            <a:ext cx="2373553" cy="1741246"/>
           </a:xfrm>
           <a:prstGeom prst="rect">
             <a:avLst/>
@@ -3984,25 +4137,23 @@
       </p:sp>
       <p:sp>
         <p:nvSpPr>
-          <p:cNvPr id="13" name="사진 자리"/>
+          <p:cNvPr id="15" name="사진 자리"/>
           <p:cNvSpPr/>
           <p:nvPr/>
         </p:nvSpPr>
         <p:spPr>
           <a:xfrm>
-            <a:off x="9086621" y="1600200"/>
-            <a:ext cx="2236393" cy="2236393"/>
+            <a:off x="9132341" y="1783080"/>
+            <a:ext cx="2282113" cy="2282113"/>
           </a:xfrm>
           <a:prstGeom prst="ellipse">
             <a:avLst/>
           </a:prstGeom>
           <a:solidFill>
-            <a:srgbClr val="D1FADC"/>
+            <a:srgbClr val="FAF1D1"/>
           </a:solidFill>
           <a:ln w="19050">
-            <a:solidFill>
-              <a:srgbClr val="26C54E"/>
-            </a:solidFill>
+            <a:noFill/>
             <a:prstDash val="dash"/>
           </a:ln>
         </p:spPr>
@@ -4020,7 +4171,7 @@
             <a:r>
               <a:rPr sz="1200" b="0" i="0">
                 <a:solidFill>
-                  <a:srgbClr val="115F25"/>
+                  <a:srgbClr val="8E8780"/>
                 </a:solidFill>
               </a:rPr>
               <a:t>사진</a:t>
@@ -4030,14 +4181,14 @@
       </p:sp>
       <p:sp>
         <p:nvSpPr>
-          <p:cNvPr id="14" name="TextBox 13"/>
+          <p:cNvPr id="16" name="TextBox 15"/>
           <p:cNvSpPr txBox="1"/>
           <p:nvPr/>
         </p:nvSpPr>
         <p:spPr>
           <a:xfrm>
-            <a:off x="8949461" y="3928033"/>
-            <a:ext cx="2510713" cy="411480"/>
+            <a:off x="8995181" y="4156633"/>
+            <a:ext cx="2556433" cy="411480"/>
           </a:xfrm>
           <a:prstGeom prst="rect">
             <a:avLst/>
@@ -4058,7 +4209,7 @@
             <a:r>
               <a:rPr sz="1600" b="1" i="0">
                 <a:solidFill>
-                  <a:srgbClr val="115F25"/>
+                  <a:srgbClr val="494127"/>
                 </a:solidFill>
               </a:rPr>
               <a:t>둘째</a:t>
@@ -4068,14 +4219,14 @@
       </p:sp>
       <p:sp>
         <p:nvSpPr>
-          <p:cNvPr id="15" name="TextBox 14"/>
+          <p:cNvPr id="17" name="TextBox 16"/>
           <p:cNvSpPr txBox="1"/>
           <p:nvPr/>
         </p:nvSpPr>
         <p:spPr>
           <a:xfrm>
-            <a:off x="9040901" y="4385233"/>
-            <a:ext cx="2327833" cy="1832686"/>
+            <a:off x="9086621" y="4613833"/>
+            <a:ext cx="2373553" cy="1741246"/>
           </a:xfrm>
           <a:prstGeom prst="rect">
             <a:avLst/>
@@ -4148,7 +4299,7 @@
     <p:bg>
       <p:bgPr>
         <a:solidFill>
-          <a:srgbClr val="26C54E"/>
+          <a:srgbClr val="FFFFFF"/>
         </a:solidFill>
         <a:effectLst/>
       </p:bgPr>
@@ -4168,13 +4319,78 @@
         </p:nvSpPr>
         <p:spPr>
           <a:xfrm>
-            <a:off x="274320" y="274320"/>
-            <a:ext cx="11643055" cy="6309360"/>
-          </a:xfrm>
-          <a:prstGeom prst="roundRect">
-            <a:avLst>
-              <a:gd name="adj" fmla="val 3500"/>
-            </a:avLst>
+            <a:off x="10180015" y="-1645920"/>
+            <a:ext cx="3474720" cy="3474720"/>
+          </a:xfrm>
+          <a:prstGeom prst="ellipse">
+            <a:avLst/>
+          </a:prstGeom>
+          <a:solidFill>
+            <a:srgbClr val="F3E1A5"/>
+          </a:solidFill>
+          <a:ln>
+            <a:noFill/>
+          </a:ln>
+        </p:spPr>
+        <p:txBody>
+          <a:bodyPr rtlCol="0" anchor="ctr"/>
+          <a:lstStyle/>
+          <a:p>
+            <a:pPr algn="ctr"/>
+          </a:p>
+        </p:txBody>
+      </p:sp>
+      <p:sp>
+        <p:nvSpPr>
+          <p:cNvPr id="4" name="상단 라벨"/>
+          <p:cNvSpPr txBox="1"/>
+          <p:nvPr/>
+        </p:nvSpPr>
+        <p:spPr>
+          <a:xfrm>
+            <a:off x="640080" y="274320"/>
+            <a:ext cx="5486400" cy="274320"/>
+          </a:xfrm>
+          <a:prstGeom prst="rect">
+            <a:avLst/>
+          </a:prstGeom>
+          <a:noFill/>
+        </p:spPr>
+        <p:txBody>
+          <a:bodyPr wrap="square" lIns="54864" rIns="54864" tIns="27432" bIns="27432" anchor="ctr">
+            <a:noAutofit/>
+          </a:bodyPr>
+          <a:lstStyle/>
+          <a:p>
+            <a:pPr algn="l">
+              <a:lnSpc>
+                <a:spcPct val="115000"/>
+              </a:lnSpc>
+            </a:pPr>
+            <a:r>
+              <a:rPr sz="900" b="1" i="0" spc="250">
+                <a:solidFill>
+                  <a:srgbClr val="26231F"/>
+                </a:solidFill>
+              </a:rPr>
+              <a:t>FAMILY ALBUM</a:t>
+            </a:r>
+          </a:p>
+        </p:txBody>
+      </p:sp>
+      <p:sp>
+        <p:nvSpPr>
+          <p:cNvPr id="5" name="포인트"/>
+          <p:cNvSpPr/>
+          <p:nvPr/>
+        </p:nvSpPr>
+        <p:spPr>
+          <a:xfrm>
+            <a:off x="11048695" y="502919"/>
+            <a:ext cx="274320" cy="274320"/>
+          </a:xfrm>
+          <a:prstGeom prst="donut">
+            <a:avLst/>
           </a:prstGeom>
           <a:solidFill>
             <a:srgbClr val="FFFFFF"/>
@@ -4203,8 +4419,8 @@
         </p:nvSpPr>
         <p:spPr>
           <a:xfrm>
-            <a:off x="731520" y="548640"/>
-            <a:ext cx="9448495" cy="868680"/>
+            <a:off x="640080" y="658368"/>
+            <a:ext cx="9082735" cy="868680"/>
           </a:xfrm>
         </p:spPr>
         <p:txBody>
@@ -4221,7 +4437,7 @@
             <a:r>
               <a:rPr sz="3000" b="1" i="0">
                 <a:solidFill>
-                  <a:srgbClr val="115F25"/>
+                  <a:srgbClr val="26231F"/>
                 </a:solidFill>
               </a:rPr>
               <a:t>우리 가족 이야기</a:t>
@@ -4231,20 +4447,20 @@
       </p:sp>
       <p:sp>
         <p:nvSpPr>
-          <p:cNvPr id="4" name="타임라인 선"/>
+          <p:cNvPr id="6" name="타임라인 선"/>
           <p:cNvSpPr/>
           <p:nvPr/>
         </p:nvSpPr>
         <p:spPr>
           <a:xfrm>
-            <a:off x="731520" y="3337560"/>
-            <a:ext cx="10728655" cy="54864"/>
+            <a:off x="640080" y="3520440"/>
+            <a:ext cx="10911535" cy="54864"/>
           </a:xfrm>
           <a:prstGeom prst="rect">
             <a:avLst/>
           </a:prstGeom>
           <a:solidFill>
-            <a:srgbClr val="D1FADC"/>
+            <a:srgbClr val="FAF1D1"/>
           </a:solidFill>
           <a:ln>
             <a:noFill/>
@@ -4260,20 +4476,20 @@
       </p:sp>
       <p:sp>
         <p:nvSpPr>
-          <p:cNvPr id="5" name="때 1"/>
+          <p:cNvPr id="7" name="때 1"/>
           <p:cNvSpPr/>
           <p:nvPr/>
         </p:nvSpPr>
         <p:spPr>
           <a:xfrm>
-            <a:off x="1871433" y="3154680"/>
+            <a:off x="1802853" y="3337560"/>
             <a:ext cx="402336" cy="402336"/>
           </a:xfrm>
           <a:prstGeom prst="ellipse">
             <a:avLst/>
           </a:prstGeom>
           <a:solidFill>
-            <a:srgbClr val="26C54E"/>
+            <a:srgbClr val="EAD07B"/>
           </a:solidFill>
           <a:ln w="38100">
             <a:solidFill>
@@ -4291,14 +4507,14 @@
       </p:sp>
       <p:sp>
         <p:nvSpPr>
-          <p:cNvPr id="6" name="TextBox 5"/>
+          <p:cNvPr id="8" name="TextBox 7"/>
           <p:cNvSpPr txBox="1"/>
           <p:nvPr/>
         </p:nvSpPr>
         <p:spPr>
           <a:xfrm>
-            <a:off x="777240" y="2514600"/>
-            <a:ext cx="2590723" cy="457200"/>
+            <a:off x="685800" y="2697480"/>
+            <a:ext cx="2636443" cy="457200"/>
           </a:xfrm>
           <a:prstGeom prst="rect">
             <a:avLst/>
@@ -4319,7 +4535,7 @@
             <a:r>
               <a:rPr sz="1600" b="1" i="0">
                 <a:solidFill>
-                  <a:srgbClr val="26C54E"/>
+                  <a:srgbClr val="EAD07B"/>
                 </a:solidFill>
               </a:rPr>
               <a:t>가족이 된 날</a:t>
@@ -4329,14 +4545,14 @@
       </p:sp>
       <p:sp>
         <p:nvSpPr>
-          <p:cNvPr id="7" name="TextBox 6"/>
+          <p:cNvPr id="9" name="TextBox 8"/>
           <p:cNvSpPr txBox="1"/>
           <p:nvPr/>
         </p:nvSpPr>
         <p:spPr>
           <a:xfrm>
-            <a:off x="822960" y="3703320"/>
-            <a:ext cx="2499283" cy="457200"/>
+            <a:off x="731519" y="3886200"/>
+            <a:ext cx="2545003" cy="457200"/>
           </a:xfrm>
           <a:prstGeom prst="rect">
             <a:avLst/>
@@ -4357,7 +4573,7 @@
             <a:r>
               <a:rPr sz="1800" b="1" i="0">
                 <a:solidFill>
-                  <a:srgbClr val="115F25"/>
+                  <a:srgbClr val="494127"/>
                 </a:solidFill>
               </a:rPr>
               <a:t>우리의 시작</a:t>
@@ -4367,14 +4583,14 @@
       </p:sp>
       <p:sp>
         <p:nvSpPr>
-          <p:cNvPr id="8" name="TextBox 7"/>
+          <p:cNvPr id="10" name="TextBox 9"/>
           <p:cNvSpPr txBox="1"/>
           <p:nvPr/>
         </p:nvSpPr>
         <p:spPr>
           <a:xfrm>
-            <a:off x="822960" y="4206240"/>
-            <a:ext cx="2499283" cy="1645920"/>
+            <a:off x="731519" y="4389120"/>
+            <a:ext cx="2545003" cy="1645920"/>
           </a:xfrm>
           <a:prstGeom prst="rect">
             <a:avLst/>
@@ -4395,7 +4611,7 @@
             <a:r>
               <a:rPr sz="1500" b="0" i="0">
                 <a:solidFill>
-                  <a:srgbClr val="2B2B2B"/>
+                  <a:srgbClr val="26231F"/>
                 </a:solidFill>
               </a:rPr>
               <a:t>처음 만난 날의 이야기</a:t>
@@ -4405,20 +4621,20 @@
       </p:sp>
       <p:sp>
         <p:nvSpPr>
-          <p:cNvPr id="9" name="때 2"/>
+          <p:cNvPr id="11" name="때 2"/>
           <p:cNvSpPr/>
           <p:nvPr/>
         </p:nvSpPr>
         <p:spPr>
           <a:xfrm>
-            <a:off x="4553597" y="3154680"/>
+            <a:off x="4530737" y="3337560"/>
             <a:ext cx="402336" cy="402336"/>
           </a:xfrm>
           <a:prstGeom prst="ellipse">
             <a:avLst/>
           </a:prstGeom>
           <a:solidFill>
-            <a:srgbClr val="26C54E"/>
+            <a:srgbClr val="EAD07B"/>
           </a:solidFill>
           <a:ln w="38100">
             <a:solidFill>
@@ -4436,14 +4652,14 @@
       </p:sp>
       <p:sp>
         <p:nvSpPr>
-          <p:cNvPr id="10" name="TextBox 9"/>
+          <p:cNvPr id="12" name="TextBox 11"/>
           <p:cNvSpPr txBox="1"/>
           <p:nvPr/>
         </p:nvSpPr>
         <p:spPr>
           <a:xfrm>
-            <a:off x="3459403" y="2514600"/>
-            <a:ext cx="2590723" cy="457200"/>
+            <a:off x="3413683" y="2697480"/>
+            <a:ext cx="2636443" cy="457200"/>
           </a:xfrm>
           <a:prstGeom prst="rect">
             <a:avLst/>
@@ -4464,7 +4680,7 @@
             <a:r>
               <a:rPr sz="1600" b="1" i="0">
                 <a:solidFill>
-                  <a:srgbClr val="26C54E"/>
+                  <a:srgbClr val="EAD07B"/>
                 </a:solidFill>
               </a:rPr>
               <a:t>아이가 태어난 날</a:t>
@@ -4474,14 +4690,14 @@
       </p:sp>
       <p:sp>
         <p:nvSpPr>
-          <p:cNvPr id="11" name="TextBox 10"/>
+          <p:cNvPr id="13" name="TextBox 12"/>
           <p:cNvSpPr txBox="1"/>
           <p:nvPr/>
         </p:nvSpPr>
         <p:spPr>
           <a:xfrm>
-            <a:off x="3505123" y="3703320"/>
-            <a:ext cx="2499283" cy="457200"/>
+            <a:off x="3459403" y="3886200"/>
+            <a:ext cx="2545003" cy="457200"/>
           </a:xfrm>
           <a:prstGeom prst="rect">
             <a:avLst/>
@@ -4502,7 +4718,7 @@
             <a:r>
               <a:rPr sz="1800" b="1" i="0">
                 <a:solidFill>
-                  <a:srgbClr val="115F25"/>
+                  <a:srgbClr val="494127"/>
                 </a:solidFill>
               </a:rPr>
               <a:t>새 식구</a:t>
@@ -4512,14 +4728,14 @@
       </p:sp>
       <p:sp>
         <p:nvSpPr>
-          <p:cNvPr id="12" name="TextBox 11"/>
+          <p:cNvPr id="14" name="TextBox 13"/>
           <p:cNvSpPr txBox="1"/>
           <p:nvPr/>
         </p:nvSpPr>
         <p:spPr>
           <a:xfrm>
-            <a:off x="3505123" y="4206240"/>
-            <a:ext cx="2499283" cy="1645920"/>
+            <a:off x="3459403" y="4389120"/>
+            <a:ext cx="2545003" cy="1645920"/>
           </a:xfrm>
           <a:prstGeom prst="rect">
             <a:avLst/>
@@ -4540,7 +4756,7 @@
             <a:r>
               <a:rPr sz="1500" b="0" i="0">
                 <a:solidFill>
-                  <a:srgbClr val="2B2B2B"/>
+                  <a:srgbClr val="26231F"/>
                 </a:solidFill>
               </a:rPr>
               <a:t>그날의 기억을 적어요</a:t>
@@ -4550,20 +4766,20 @@
       </p:sp>
       <p:sp>
         <p:nvSpPr>
-          <p:cNvPr id="13" name="때 3"/>
+          <p:cNvPr id="15" name="때 3"/>
           <p:cNvSpPr/>
           <p:nvPr/>
         </p:nvSpPr>
         <p:spPr>
           <a:xfrm>
-            <a:off x="7235761" y="3154680"/>
+            <a:off x="7258621" y="3337560"/>
             <a:ext cx="402336" cy="402336"/>
           </a:xfrm>
           <a:prstGeom prst="ellipse">
             <a:avLst/>
           </a:prstGeom>
           <a:solidFill>
-            <a:srgbClr val="26C54E"/>
+            <a:srgbClr val="EAD07B"/>
           </a:solidFill>
           <a:ln w="38100">
             <a:solidFill>
@@ -4581,14 +4797,14 @@
       </p:sp>
       <p:sp>
         <p:nvSpPr>
-          <p:cNvPr id="14" name="TextBox 13"/>
+          <p:cNvPr id="16" name="TextBox 15"/>
           <p:cNvSpPr txBox="1"/>
           <p:nvPr/>
         </p:nvSpPr>
         <p:spPr>
           <a:xfrm>
-            <a:off x="6141567" y="2514600"/>
-            <a:ext cx="2590723" cy="457200"/>
+            <a:off x="6141567" y="2697480"/>
+            <a:ext cx="2636443" cy="457200"/>
           </a:xfrm>
           <a:prstGeom prst="rect">
             <a:avLst/>
@@ -4609,7 +4825,7 @@
             <a:r>
               <a:rPr sz="1600" b="1" i="0">
                 <a:solidFill>
-                  <a:srgbClr val="26C54E"/>
+                  <a:srgbClr val="EAD07B"/>
                 </a:solidFill>
               </a:rPr>
               <a:t>첫 가족 여행</a:t>
@@ -4619,14 +4835,14 @@
       </p:sp>
       <p:sp>
         <p:nvSpPr>
-          <p:cNvPr id="15" name="TextBox 14"/>
+          <p:cNvPr id="17" name="TextBox 16"/>
           <p:cNvSpPr txBox="1"/>
           <p:nvPr/>
         </p:nvSpPr>
         <p:spPr>
           <a:xfrm>
-            <a:off x="6187287" y="3703320"/>
-            <a:ext cx="2499283" cy="457200"/>
+            <a:off x="6187287" y="3886200"/>
+            <a:ext cx="2545003" cy="457200"/>
           </a:xfrm>
           <a:prstGeom prst="rect">
             <a:avLst/>
@@ -4647,7 +4863,7 @@
             <a:r>
               <a:rPr sz="1800" b="1" i="0">
                 <a:solidFill>
-                  <a:srgbClr val="115F25"/>
+                  <a:srgbClr val="494127"/>
                 </a:solidFill>
               </a:rPr>
               <a:t>함께 떠난 길</a:t>
@@ -4657,14 +4873,14 @@
       </p:sp>
       <p:sp>
         <p:nvSpPr>
-          <p:cNvPr id="16" name="TextBox 15"/>
+          <p:cNvPr id="18" name="TextBox 17"/>
           <p:cNvSpPr txBox="1"/>
           <p:nvPr/>
         </p:nvSpPr>
         <p:spPr>
           <a:xfrm>
-            <a:off x="6187287" y="4206240"/>
-            <a:ext cx="2499283" cy="1645920"/>
+            <a:off x="6187287" y="4389120"/>
+            <a:ext cx="2545003" cy="1645920"/>
           </a:xfrm>
           <a:prstGeom prst="rect">
             <a:avLst/>
@@ -4685,7 +4901,7 @@
             <a:r>
               <a:rPr sz="1500" b="0" i="0">
                 <a:solidFill>
-                  <a:srgbClr val="2B2B2B"/>
+                  <a:srgbClr val="26231F"/>
                 </a:solidFill>
               </a:rPr>
               <a:t>가장 웃었던 순간</a:t>
@@ -4695,20 +4911,20 @@
       </p:sp>
       <p:sp>
         <p:nvSpPr>
-          <p:cNvPr id="17" name="때 4"/>
+          <p:cNvPr id="19" name="때 4"/>
           <p:cNvSpPr/>
           <p:nvPr/>
         </p:nvSpPr>
         <p:spPr>
           <a:xfrm>
-            <a:off x="9917925" y="3154680"/>
+            <a:off x="9986505" y="3337560"/>
             <a:ext cx="402336" cy="402336"/>
           </a:xfrm>
           <a:prstGeom prst="ellipse">
             <a:avLst/>
           </a:prstGeom>
           <a:solidFill>
-            <a:srgbClr val="26C54E"/>
+            <a:srgbClr val="EAD07B"/>
           </a:solidFill>
           <a:ln w="38100">
             <a:solidFill>
@@ -4726,14 +4942,14 @@
       </p:sp>
       <p:sp>
         <p:nvSpPr>
-          <p:cNvPr id="18" name="TextBox 17"/>
+          <p:cNvPr id="20" name="TextBox 19"/>
           <p:cNvSpPr txBox="1"/>
           <p:nvPr/>
         </p:nvSpPr>
         <p:spPr>
           <a:xfrm>
-            <a:off x="8823731" y="2514600"/>
-            <a:ext cx="2590723" cy="457200"/>
+            <a:off x="8869451" y="2697480"/>
+            <a:ext cx="2636443" cy="457200"/>
           </a:xfrm>
           <a:prstGeom prst="rect">
             <a:avLst/>
@@ -4754,7 +4970,7 @@
             <a:r>
               <a:rPr sz="1600" b="1" i="0">
                 <a:solidFill>
-                  <a:srgbClr val="26C54E"/>
+                  <a:srgbClr val="EAD07B"/>
                 </a:solidFill>
               </a:rPr>
               <a:t>지금</a:t>
@@ -4764,14 +4980,14 @@
       </p:sp>
       <p:sp>
         <p:nvSpPr>
-          <p:cNvPr id="19" name="TextBox 18"/>
+          <p:cNvPr id="21" name="TextBox 20"/>
           <p:cNvSpPr txBox="1"/>
           <p:nvPr/>
         </p:nvSpPr>
         <p:spPr>
           <a:xfrm>
-            <a:off x="8869451" y="3703320"/>
-            <a:ext cx="2499283" cy="457200"/>
+            <a:off x="8915171" y="3886200"/>
+            <a:ext cx="2545003" cy="457200"/>
           </a:xfrm>
           <a:prstGeom prst="rect">
             <a:avLst/>
@@ -4792,7 +5008,7 @@
             <a:r>
               <a:rPr sz="1800" b="1" i="0">
                 <a:solidFill>
-                  <a:srgbClr val="115F25"/>
+                  <a:srgbClr val="494127"/>
                 </a:solidFill>
               </a:rPr>
               <a:t>오늘의 우리</a:t>
@@ -4802,14 +5018,14 @@
       </p:sp>
       <p:sp>
         <p:nvSpPr>
-          <p:cNvPr id="20" name="TextBox 19"/>
+          <p:cNvPr id="22" name="TextBox 21"/>
           <p:cNvSpPr txBox="1"/>
           <p:nvPr/>
         </p:nvSpPr>
         <p:spPr>
           <a:xfrm>
-            <a:off x="8869451" y="4206240"/>
-            <a:ext cx="2499283" cy="1645920"/>
+            <a:off x="8915171" y="4389120"/>
+            <a:ext cx="2545003" cy="1645920"/>
           </a:xfrm>
           <a:prstGeom prst="rect">
             <a:avLst/>
@@ -4830,7 +5046,7 @@
             <a:r>
               <a:rPr sz="1500" b="0" i="0">
                 <a:solidFill>
-                  <a:srgbClr val="2B2B2B"/>
+                  <a:srgbClr val="26231F"/>
                 </a:solidFill>
               </a:rPr>
               <a:t>요즘 우리 이야기</a:t>
@@ -4852,7 +5068,7 @@
     <p:bg>
       <p:bgPr>
         <a:solidFill>
-          <a:srgbClr val="26C54E"/>
+          <a:srgbClr val="FFFFFF"/>
         </a:solidFill>
         <a:effectLst/>
       </p:bgPr>
@@ -4872,13 +5088,78 @@
         </p:nvSpPr>
         <p:spPr>
           <a:xfrm>
-            <a:off x="274320" y="274320"/>
-            <a:ext cx="11643055" cy="6309360"/>
-          </a:xfrm>
-          <a:prstGeom prst="roundRect">
-            <a:avLst>
-              <a:gd name="adj" fmla="val 3500"/>
-            </a:avLst>
+            <a:off x="10180015" y="-1645920"/>
+            <a:ext cx="3474720" cy="3474720"/>
+          </a:xfrm>
+          <a:prstGeom prst="ellipse">
+            <a:avLst/>
+          </a:prstGeom>
+          <a:solidFill>
+            <a:srgbClr val="F3E1A5"/>
+          </a:solidFill>
+          <a:ln>
+            <a:noFill/>
+          </a:ln>
+        </p:spPr>
+        <p:txBody>
+          <a:bodyPr rtlCol="0" anchor="ctr"/>
+          <a:lstStyle/>
+          <a:p>
+            <a:pPr algn="ctr"/>
+          </a:p>
+        </p:txBody>
+      </p:sp>
+      <p:sp>
+        <p:nvSpPr>
+          <p:cNvPr id="4" name="상단 라벨"/>
+          <p:cNvSpPr txBox="1"/>
+          <p:nvPr/>
+        </p:nvSpPr>
+        <p:spPr>
+          <a:xfrm>
+            <a:off x="640080" y="274320"/>
+            <a:ext cx="5486400" cy="274320"/>
+          </a:xfrm>
+          <a:prstGeom prst="rect">
+            <a:avLst/>
+          </a:prstGeom>
+          <a:noFill/>
+        </p:spPr>
+        <p:txBody>
+          <a:bodyPr wrap="square" lIns="54864" rIns="54864" tIns="27432" bIns="27432" anchor="ctr">
+            <a:noAutofit/>
+          </a:bodyPr>
+          <a:lstStyle/>
+          <a:p>
+            <a:pPr algn="l">
+              <a:lnSpc>
+                <a:spcPct val="115000"/>
+              </a:lnSpc>
+            </a:pPr>
+            <a:r>
+              <a:rPr sz="900" b="1" i="0" spc="250">
+                <a:solidFill>
+                  <a:srgbClr val="26231F"/>
+                </a:solidFill>
+              </a:rPr>
+              <a:t>FAMILY ALBUM</a:t>
+            </a:r>
+          </a:p>
+        </p:txBody>
+      </p:sp>
+      <p:sp>
+        <p:nvSpPr>
+          <p:cNvPr id="5" name="포인트"/>
+          <p:cNvSpPr/>
+          <p:nvPr/>
+        </p:nvSpPr>
+        <p:spPr>
+          <a:xfrm>
+            <a:off x="11048695" y="502919"/>
+            <a:ext cx="274320" cy="274320"/>
+          </a:xfrm>
+          <a:prstGeom prst="donut">
+            <a:avLst/>
           </a:prstGeom>
           <a:solidFill>
             <a:srgbClr val="FFFFFF"/>
@@ -4907,8 +5188,8 @@
         </p:nvSpPr>
         <p:spPr>
           <a:xfrm>
-            <a:off x="731520" y="548640"/>
-            <a:ext cx="9448495" cy="868680"/>
+            <a:off x="640080" y="658368"/>
+            <a:ext cx="9082735" cy="868680"/>
           </a:xfrm>
         </p:spPr>
         <p:txBody>
@@ -4925,7 +5206,7 @@
             <a:r>
               <a:rPr sz="3000" b="1" i="0">
                 <a:solidFill>
-                  <a:srgbClr val="115F25"/>
+                  <a:srgbClr val="26231F"/>
                 </a:solidFill>
               </a:rPr>
               <a:t>우리 가족의 약속</a:t>
@@ -4935,26 +5216,26 @@
       </p:sp>
       <p:sp>
         <p:nvSpPr>
-          <p:cNvPr id="4" name="줄 1"/>
+          <p:cNvPr id="6" name="줄 1"/>
           <p:cNvSpPr/>
           <p:nvPr/>
         </p:nvSpPr>
         <p:spPr>
           <a:xfrm>
-            <a:off x="731520" y="1600200"/>
-            <a:ext cx="10728655" cy="1005840"/>
+            <a:off x="640080" y="1783080"/>
+            <a:ext cx="10911535" cy="1005840"/>
           </a:xfrm>
           <a:prstGeom prst="roundRect">
             <a:avLst>
-              <a:gd name="adj" fmla="val 8000"/>
+              <a:gd name="adj" fmla="val 3000"/>
             </a:avLst>
           </a:prstGeom>
           <a:solidFill>
-            <a:srgbClr val="EEFCF1"/>
+            <a:srgbClr val="FFFFFF"/>
           </a:solidFill>
-          <a:ln w="12700">
+          <a:ln w="9525">
             <a:solidFill>
-              <a:srgbClr val="D1FADC"/>
+              <a:srgbClr val="FAF1D1"/>
             </a:solidFill>
           </a:ln>
         </p:spPr>
@@ -4968,20 +5249,49 @@
       </p:sp>
       <p:sp>
         <p:nvSpPr>
-          <p:cNvPr id="5" name="번호 1"/>
+          <p:cNvPr id="7" name="위쪽 띠"/>
           <p:cNvSpPr/>
           <p:nvPr/>
         </p:nvSpPr>
         <p:spPr>
           <a:xfrm>
-            <a:off x="914400" y="1874519"/>
+            <a:off x="649224" y="1792224"/>
+            <a:ext cx="10893247" cy="82296"/>
+          </a:xfrm>
+          <a:prstGeom prst="rect">
+            <a:avLst/>
+          </a:prstGeom>
+          <a:solidFill>
+            <a:srgbClr val="EAD07B"/>
+          </a:solidFill>
+          <a:ln>
+            <a:noFill/>
+          </a:ln>
+        </p:spPr>
+        <p:txBody>
+          <a:bodyPr rtlCol="0" anchor="ctr"/>
+          <a:lstStyle/>
+          <a:p>
+            <a:pPr algn="ctr"/>
+          </a:p>
+        </p:txBody>
+      </p:sp>
+      <p:sp>
+        <p:nvSpPr>
+          <p:cNvPr id="8" name="번호 1"/>
+          <p:cNvSpPr/>
+          <p:nvPr/>
+        </p:nvSpPr>
+        <p:spPr>
+          <a:xfrm>
+            <a:off x="822959" y="2057400"/>
             <a:ext cx="457200" cy="457200"/>
           </a:xfrm>
           <a:prstGeom prst="ellipse">
             <a:avLst/>
           </a:prstGeom>
           <a:solidFill>
-            <a:srgbClr val="26C54E"/>
+            <a:srgbClr val="DCEF9F"/>
           </a:solidFill>
           <a:ln>
             <a:noFill/>
@@ -5001,7 +5311,7 @@
             <a:r>
               <a:rPr sz="1600" b="1" i="0">
                 <a:solidFill>
-                  <a:srgbClr val="FFFFFF"/>
+                  <a:srgbClr val="26231F"/>
                 </a:solidFill>
               </a:rPr>
               <a:t>1</a:t>
@@ -5011,13 +5321,13 @@
       </p:sp>
       <p:sp>
         <p:nvSpPr>
-          <p:cNvPr id="6" name="TextBox 5"/>
+          <p:cNvPr id="9" name="TextBox 8"/>
           <p:cNvSpPr txBox="1"/>
           <p:nvPr/>
         </p:nvSpPr>
         <p:spPr>
           <a:xfrm>
-            <a:off x="1600200" y="1645920"/>
+            <a:off x="1508760" y="1828800"/>
             <a:ext cx="2743200" cy="914400"/>
           </a:xfrm>
           <a:prstGeom prst="rect">
@@ -5039,7 +5349,7 @@
             <a:r>
               <a:rPr sz="1800" b="1" i="0">
                 <a:solidFill>
-                  <a:srgbClr val="115F25"/>
+                  <a:srgbClr val="494127"/>
                 </a:solidFill>
               </a:rPr>
               <a:t>약속 1</a:t>
@@ -5049,14 +5359,14 @@
       </p:sp>
       <p:sp>
         <p:nvSpPr>
-          <p:cNvPr id="7" name="TextBox 6"/>
+          <p:cNvPr id="10" name="TextBox 9"/>
           <p:cNvSpPr txBox="1"/>
           <p:nvPr/>
         </p:nvSpPr>
         <p:spPr>
           <a:xfrm>
-            <a:off x="4389120" y="1645920"/>
-            <a:ext cx="6888175" cy="914400"/>
+            <a:off x="4297680" y="1828800"/>
+            <a:ext cx="7071055" cy="914400"/>
           </a:xfrm>
           <a:prstGeom prst="rect">
             <a:avLst/>
@@ -5077,7 +5387,7 @@
             <a:r>
               <a:rPr sz="1700" b="0" i="0">
                 <a:solidFill>
-                  <a:srgbClr val="2B2B2B"/>
+                  <a:srgbClr val="26231F"/>
                 </a:solidFill>
               </a:rPr>
               <a:t>밥은 꼭 함께 먹기</a:t>
@@ -5087,26 +5397,26 @@
       </p:sp>
       <p:sp>
         <p:nvSpPr>
-          <p:cNvPr id="8" name="줄 2"/>
+          <p:cNvPr id="11" name="줄 2"/>
           <p:cNvSpPr/>
           <p:nvPr/>
         </p:nvSpPr>
         <p:spPr>
           <a:xfrm>
-            <a:off x="731520" y="2743200"/>
-            <a:ext cx="10728655" cy="1005840"/>
+            <a:off x="640080" y="2926080"/>
+            <a:ext cx="10911535" cy="1005840"/>
           </a:xfrm>
           <a:prstGeom prst="roundRect">
             <a:avLst>
-              <a:gd name="adj" fmla="val 8000"/>
+              <a:gd name="adj" fmla="val 3000"/>
             </a:avLst>
           </a:prstGeom>
           <a:solidFill>
-            <a:srgbClr val="EEFCF1"/>
+            <a:srgbClr val="FFFFFF"/>
           </a:solidFill>
-          <a:ln w="12700">
+          <a:ln w="9525">
             <a:solidFill>
-              <a:srgbClr val="D1FADC"/>
+              <a:srgbClr val="FAF1D1"/>
             </a:solidFill>
           </a:ln>
         </p:spPr>
@@ -5120,20 +5430,49 @@
       </p:sp>
       <p:sp>
         <p:nvSpPr>
-          <p:cNvPr id="9" name="번호 2"/>
+          <p:cNvPr id="12" name="위쪽 띠"/>
           <p:cNvSpPr/>
           <p:nvPr/>
         </p:nvSpPr>
         <p:spPr>
           <a:xfrm>
-            <a:off x="914400" y="3017520"/>
+            <a:off x="649224" y="2935224"/>
+            <a:ext cx="10893247" cy="82296"/>
+          </a:xfrm>
+          <a:prstGeom prst="rect">
+            <a:avLst/>
+          </a:prstGeom>
+          <a:solidFill>
+            <a:srgbClr val="EAD07B"/>
+          </a:solidFill>
+          <a:ln>
+            <a:noFill/>
+          </a:ln>
+        </p:spPr>
+        <p:txBody>
+          <a:bodyPr rtlCol="0" anchor="ctr"/>
+          <a:lstStyle/>
+          <a:p>
+            <a:pPr algn="ctr"/>
+          </a:p>
+        </p:txBody>
+      </p:sp>
+      <p:sp>
+        <p:nvSpPr>
+          <p:cNvPr id="13" name="번호 2"/>
+          <p:cNvSpPr/>
+          <p:nvPr/>
+        </p:nvSpPr>
+        <p:spPr>
+          <a:xfrm>
+            <a:off x="822959" y="3200400"/>
             <a:ext cx="457200" cy="457200"/>
           </a:xfrm>
           <a:prstGeom prst="ellipse">
             <a:avLst/>
           </a:prstGeom>
           <a:solidFill>
-            <a:srgbClr val="26C54E"/>
+            <a:srgbClr val="DCEF9F"/>
           </a:solidFill>
           <a:ln>
             <a:noFill/>
@@ -5153,7 +5492,7 @@
             <a:r>
               <a:rPr sz="1600" b="1" i="0">
                 <a:solidFill>
-                  <a:srgbClr val="FFFFFF"/>
+                  <a:srgbClr val="26231F"/>
                 </a:solidFill>
               </a:rPr>
               <a:t>2</a:t>
@@ -5163,13 +5502,13 @@
       </p:sp>
       <p:sp>
         <p:nvSpPr>
-          <p:cNvPr id="10" name="TextBox 9"/>
+          <p:cNvPr id="14" name="TextBox 13"/>
           <p:cNvSpPr txBox="1"/>
           <p:nvPr/>
         </p:nvSpPr>
         <p:spPr>
           <a:xfrm>
-            <a:off x="1600200" y="2788920"/>
+            <a:off x="1508760" y="2971800"/>
             <a:ext cx="2743200" cy="914400"/>
           </a:xfrm>
           <a:prstGeom prst="rect">
@@ -5191,7 +5530,7 @@
             <a:r>
               <a:rPr sz="1800" b="1" i="0">
                 <a:solidFill>
-                  <a:srgbClr val="115F25"/>
+                  <a:srgbClr val="494127"/>
                 </a:solidFill>
               </a:rPr>
               <a:t>약속 2</a:t>
@@ -5201,14 +5540,14 @@
       </p:sp>
       <p:sp>
         <p:nvSpPr>
-          <p:cNvPr id="11" name="TextBox 10"/>
+          <p:cNvPr id="15" name="TextBox 14"/>
           <p:cNvSpPr txBox="1"/>
           <p:nvPr/>
         </p:nvSpPr>
         <p:spPr>
           <a:xfrm>
-            <a:off x="4389120" y="2788920"/>
-            <a:ext cx="6888175" cy="914400"/>
+            <a:off x="4297680" y="2971800"/>
+            <a:ext cx="7071055" cy="914400"/>
           </a:xfrm>
           <a:prstGeom prst="rect">
             <a:avLst/>
@@ -5229,7 +5568,7 @@
             <a:r>
               <a:rPr sz="1700" b="0" i="0">
                 <a:solidFill>
-                  <a:srgbClr val="2B2B2B"/>
+                  <a:srgbClr val="26231F"/>
                 </a:solidFill>
               </a:rPr>
               <a:t>잠들기 전에 사랑한다고 말하기</a:t>
@@ -5239,26 +5578,26 @@
       </p:sp>
       <p:sp>
         <p:nvSpPr>
-          <p:cNvPr id="12" name="줄 3"/>
+          <p:cNvPr id="16" name="줄 3"/>
           <p:cNvSpPr/>
           <p:nvPr/>
         </p:nvSpPr>
         <p:spPr>
           <a:xfrm>
-            <a:off x="731520" y="3886200"/>
-            <a:ext cx="10728655" cy="1005840"/>
+            <a:off x="640080" y="4069080"/>
+            <a:ext cx="10911535" cy="1005840"/>
           </a:xfrm>
           <a:prstGeom prst="roundRect">
             <a:avLst>
-              <a:gd name="adj" fmla="val 8000"/>
+              <a:gd name="adj" fmla="val 3000"/>
             </a:avLst>
           </a:prstGeom>
           <a:solidFill>
-            <a:srgbClr val="EEFCF1"/>
+            <a:srgbClr val="FFFFFF"/>
           </a:solidFill>
-          <a:ln w="12700">
+          <a:ln w="9525">
             <a:solidFill>
-              <a:srgbClr val="D1FADC"/>
+              <a:srgbClr val="FAF1D1"/>
             </a:solidFill>
           </a:ln>
         </p:spPr>
@@ -5272,20 +5611,49 @@
       </p:sp>
       <p:sp>
         <p:nvSpPr>
-          <p:cNvPr id="13" name="번호 3"/>
+          <p:cNvPr id="17" name="위쪽 띠"/>
           <p:cNvSpPr/>
           <p:nvPr/>
         </p:nvSpPr>
         <p:spPr>
           <a:xfrm>
-            <a:off x="914400" y="4160520"/>
+            <a:off x="649224" y="4078224"/>
+            <a:ext cx="10893247" cy="82296"/>
+          </a:xfrm>
+          <a:prstGeom prst="rect">
+            <a:avLst/>
+          </a:prstGeom>
+          <a:solidFill>
+            <a:srgbClr val="EAD07B"/>
+          </a:solidFill>
+          <a:ln>
+            <a:noFill/>
+          </a:ln>
+        </p:spPr>
+        <p:txBody>
+          <a:bodyPr rtlCol="0" anchor="ctr"/>
+          <a:lstStyle/>
+          <a:p>
+            <a:pPr algn="ctr"/>
+          </a:p>
+        </p:txBody>
+      </p:sp>
+      <p:sp>
+        <p:nvSpPr>
+          <p:cNvPr id="18" name="번호 3"/>
+          <p:cNvSpPr/>
+          <p:nvPr/>
+        </p:nvSpPr>
+        <p:spPr>
+          <a:xfrm>
+            <a:off x="822959" y="4343400"/>
             <a:ext cx="457200" cy="457200"/>
           </a:xfrm>
           <a:prstGeom prst="ellipse">
             <a:avLst/>
           </a:prstGeom>
           <a:solidFill>
-            <a:srgbClr val="26C54E"/>
+            <a:srgbClr val="DCEF9F"/>
           </a:solidFill>
           <a:ln>
             <a:noFill/>
@@ -5305,7 +5673,7 @@
             <a:r>
               <a:rPr sz="1600" b="1" i="0">
                 <a:solidFill>
-                  <a:srgbClr val="FFFFFF"/>
+                  <a:srgbClr val="26231F"/>
                 </a:solidFill>
               </a:rPr>
               <a:t>3</a:t>
@@ -5315,13 +5683,13 @@
       </p:sp>
       <p:sp>
         <p:nvSpPr>
-          <p:cNvPr id="14" name="TextBox 13"/>
+          <p:cNvPr id="19" name="TextBox 18"/>
           <p:cNvSpPr txBox="1"/>
           <p:nvPr/>
         </p:nvSpPr>
         <p:spPr>
           <a:xfrm>
-            <a:off x="1600200" y="3931920"/>
+            <a:off x="1508760" y="4114800"/>
             <a:ext cx="2743200" cy="914400"/>
           </a:xfrm>
           <a:prstGeom prst="rect">
@@ -5343,7 +5711,7 @@
             <a:r>
               <a:rPr sz="1800" b="1" i="0">
                 <a:solidFill>
-                  <a:srgbClr val="115F25"/>
+                  <a:srgbClr val="494127"/>
                 </a:solidFill>
               </a:rPr>
               <a:t>약속 3</a:t>
@@ -5353,14 +5721,14 @@
       </p:sp>
       <p:sp>
         <p:nvSpPr>
-          <p:cNvPr id="15" name="TextBox 14"/>
+          <p:cNvPr id="20" name="TextBox 19"/>
           <p:cNvSpPr txBox="1"/>
           <p:nvPr/>
         </p:nvSpPr>
         <p:spPr>
           <a:xfrm>
-            <a:off x="4389120" y="3931920"/>
-            <a:ext cx="6888175" cy="914400"/>
+            <a:off x="4297680" y="4114800"/>
+            <a:ext cx="7071055" cy="914400"/>
           </a:xfrm>
           <a:prstGeom prst="rect">
             <a:avLst/>
@@ -5381,7 +5749,7 @@
             <a:r>
               <a:rPr sz="1700" b="0" i="0">
                 <a:solidFill>
-                  <a:srgbClr val="2B2B2B"/>
+                  <a:srgbClr val="26231F"/>
                 </a:solidFill>
               </a:rPr>
               <a:t>주말에는 함께 산책하기</a:t>
@@ -5403,7 +5771,7 @@
     <p:bg>
       <p:bgPr>
         <a:solidFill>
-          <a:srgbClr val="26C54E"/>
+          <a:srgbClr val="FFFFFF"/>
         </a:solidFill>
         <a:effectLst/>
       </p:bgPr>
@@ -5423,13 +5791,78 @@
         </p:nvSpPr>
         <p:spPr>
           <a:xfrm>
-            <a:off x="274320" y="274320"/>
-            <a:ext cx="11643055" cy="6309360"/>
-          </a:xfrm>
-          <a:prstGeom prst="roundRect">
-            <a:avLst>
-              <a:gd name="adj" fmla="val 3500"/>
-            </a:avLst>
+            <a:off x="10180015" y="-1645920"/>
+            <a:ext cx="3474720" cy="3474720"/>
+          </a:xfrm>
+          <a:prstGeom prst="ellipse">
+            <a:avLst/>
+          </a:prstGeom>
+          <a:solidFill>
+            <a:srgbClr val="F3E1A5"/>
+          </a:solidFill>
+          <a:ln>
+            <a:noFill/>
+          </a:ln>
+        </p:spPr>
+        <p:txBody>
+          <a:bodyPr rtlCol="0" anchor="ctr"/>
+          <a:lstStyle/>
+          <a:p>
+            <a:pPr algn="ctr"/>
+          </a:p>
+        </p:txBody>
+      </p:sp>
+      <p:sp>
+        <p:nvSpPr>
+          <p:cNvPr id="4" name="상단 라벨"/>
+          <p:cNvSpPr txBox="1"/>
+          <p:nvPr/>
+        </p:nvSpPr>
+        <p:spPr>
+          <a:xfrm>
+            <a:off x="640080" y="274320"/>
+            <a:ext cx="5486400" cy="274320"/>
+          </a:xfrm>
+          <a:prstGeom prst="rect">
+            <a:avLst/>
+          </a:prstGeom>
+          <a:noFill/>
+        </p:spPr>
+        <p:txBody>
+          <a:bodyPr wrap="square" lIns="54864" rIns="54864" tIns="27432" bIns="27432" anchor="ctr">
+            <a:noAutofit/>
+          </a:bodyPr>
+          <a:lstStyle/>
+          <a:p>
+            <a:pPr algn="l">
+              <a:lnSpc>
+                <a:spcPct val="115000"/>
+              </a:lnSpc>
+            </a:pPr>
+            <a:r>
+              <a:rPr sz="900" b="1" i="0" spc="250">
+                <a:solidFill>
+                  <a:srgbClr val="26231F"/>
+                </a:solidFill>
+              </a:rPr>
+              <a:t>FAMILY ALBUM</a:t>
+            </a:r>
+          </a:p>
+        </p:txBody>
+      </p:sp>
+      <p:sp>
+        <p:nvSpPr>
+          <p:cNvPr id="5" name="포인트"/>
+          <p:cNvSpPr/>
+          <p:nvPr/>
+        </p:nvSpPr>
+        <p:spPr>
+          <a:xfrm>
+            <a:off x="11048695" y="502919"/>
+            <a:ext cx="274320" cy="274320"/>
+          </a:xfrm>
+          <a:prstGeom prst="donut">
+            <a:avLst/>
           </a:prstGeom>
           <a:solidFill>
             <a:srgbClr val="FFFFFF"/>
@@ -5458,8 +5891,8 @@
         </p:nvSpPr>
         <p:spPr>
           <a:xfrm>
-            <a:off x="731520" y="548640"/>
-            <a:ext cx="9448495" cy="868680"/>
+            <a:off x="640080" y="658368"/>
+            <a:ext cx="9082735" cy="868680"/>
           </a:xfrm>
         </p:spPr>
         <p:txBody>
@@ -5476,7 +5909,7 @@
             <a:r>
               <a:rPr sz="3000" b="1" i="0">
                 <a:solidFill>
-                  <a:srgbClr val="115F25"/>
+                  <a:srgbClr val="26231F"/>
                 </a:solidFill>
               </a:rPr>
               <a:t>가족 사진</a:t>
@@ -5486,14 +5919,14 @@
       </p:sp>
       <p:sp>
         <p:nvSpPr>
-          <p:cNvPr id="4" name="사진 자리"/>
+          <p:cNvPr id="6" name="사진 자리"/>
           <p:cNvSpPr/>
           <p:nvPr/>
         </p:nvSpPr>
         <p:spPr>
           <a:xfrm>
-            <a:off x="731520" y="1600200"/>
-            <a:ext cx="3454298" cy="2217420"/>
+            <a:off x="640080" y="1783080"/>
+            <a:ext cx="3515258" cy="2194560"/>
           </a:xfrm>
           <a:prstGeom prst="roundRect">
             <a:avLst>
@@ -5501,12 +5934,10 @@
             </a:avLst>
           </a:prstGeom>
           <a:solidFill>
-            <a:srgbClr val="D1FADC"/>
+            <a:srgbClr val="FAF1D1"/>
           </a:solidFill>
           <a:ln w="19050">
-            <a:solidFill>
-              <a:srgbClr val="26C54E"/>
-            </a:solidFill>
+            <a:noFill/>
             <a:prstDash val="dash"/>
           </a:ln>
         </p:spPr>
@@ -5524,7 +5955,7 @@
             <a:r>
               <a:rPr sz="1200" b="0" i="0">
                 <a:solidFill>
-                  <a:srgbClr val="115F25"/>
+                  <a:srgbClr val="8E8780"/>
                 </a:solidFill>
               </a:rPr>
               <a:t>사진 1</a:t>
@@ -5534,14 +5965,14 @@
       </p:sp>
       <p:sp>
         <p:nvSpPr>
-          <p:cNvPr id="5" name="사진 자리"/>
+          <p:cNvPr id="7" name="사진 자리"/>
           <p:cNvSpPr/>
           <p:nvPr/>
         </p:nvSpPr>
         <p:spPr>
           <a:xfrm>
-            <a:off x="4368698" y="1600200"/>
-            <a:ext cx="3454298" cy="2217420"/>
+            <a:off x="4338218" y="1783080"/>
+            <a:ext cx="3515258" cy="2194560"/>
           </a:xfrm>
           <a:prstGeom prst="roundRect">
             <a:avLst>
@@ -5549,12 +5980,10 @@
             </a:avLst>
           </a:prstGeom>
           <a:solidFill>
-            <a:srgbClr val="D1FADC"/>
+            <a:srgbClr val="FAF1D1"/>
           </a:solidFill>
           <a:ln w="19050">
-            <a:solidFill>
-              <a:srgbClr val="26C54E"/>
-            </a:solidFill>
+            <a:noFill/>
             <a:prstDash val="dash"/>
           </a:ln>
         </p:spPr>
@@ -5572,7 +6001,7 @@
             <a:r>
               <a:rPr sz="1200" b="0" i="0">
                 <a:solidFill>
-                  <a:srgbClr val="115F25"/>
+                  <a:srgbClr val="8E8780"/>
                 </a:solidFill>
               </a:rPr>
               <a:t>사진 2</a:t>
@@ -5582,14 +6011,14 @@
       </p:sp>
       <p:sp>
         <p:nvSpPr>
-          <p:cNvPr id="6" name="사진 자리"/>
+          <p:cNvPr id="8" name="사진 자리"/>
           <p:cNvSpPr/>
           <p:nvPr/>
         </p:nvSpPr>
         <p:spPr>
           <a:xfrm>
-            <a:off x="8005876" y="1600200"/>
-            <a:ext cx="3454298" cy="2217420"/>
+            <a:off x="8036356" y="1783080"/>
+            <a:ext cx="3515258" cy="2194560"/>
           </a:xfrm>
           <a:prstGeom prst="roundRect">
             <a:avLst>
@@ -5597,12 +6026,10 @@
             </a:avLst>
           </a:prstGeom>
           <a:solidFill>
-            <a:srgbClr val="D1FADC"/>
+            <a:srgbClr val="FAF1D1"/>
           </a:solidFill>
           <a:ln w="19050">
-            <a:solidFill>
-              <a:srgbClr val="26C54E"/>
-            </a:solidFill>
+            <a:noFill/>
             <a:prstDash val="dash"/>
           </a:ln>
         </p:spPr>
@@ -5620,7 +6047,7 @@
             <a:r>
               <a:rPr sz="1200" b="0" i="0">
                 <a:solidFill>
-                  <a:srgbClr val="115F25"/>
+                  <a:srgbClr val="8E8780"/>
                 </a:solidFill>
               </a:rPr>
               <a:t>사진 3</a:t>
@@ -5630,14 +6057,14 @@
       </p:sp>
       <p:sp>
         <p:nvSpPr>
-          <p:cNvPr id="7" name="사진 자리"/>
+          <p:cNvPr id="9" name="사진 자리"/>
           <p:cNvSpPr/>
           <p:nvPr/>
         </p:nvSpPr>
         <p:spPr>
           <a:xfrm>
-            <a:off x="731520" y="4000500"/>
-            <a:ext cx="3454298" cy="2217420"/>
+            <a:off x="640080" y="4160520"/>
+            <a:ext cx="3515258" cy="2194560"/>
           </a:xfrm>
           <a:prstGeom prst="roundRect">
             <a:avLst>
@@ -5645,12 +6072,10 @@
             </a:avLst>
           </a:prstGeom>
           <a:solidFill>
-            <a:srgbClr val="D1FADC"/>
+            <a:srgbClr val="FAF1D1"/>
           </a:solidFill>
           <a:ln w="19050">
-            <a:solidFill>
-              <a:srgbClr val="26C54E"/>
-            </a:solidFill>
+            <a:noFill/>
             <a:prstDash val="dash"/>
           </a:ln>
         </p:spPr>
@@ -5668,7 +6093,7 @@
             <a:r>
               <a:rPr sz="1200" b="0" i="0">
                 <a:solidFill>
-                  <a:srgbClr val="115F25"/>
+                  <a:srgbClr val="8E8780"/>
                 </a:solidFill>
               </a:rPr>
               <a:t>사진 4</a:t>
@@ -5678,14 +6103,14 @@
       </p:sp>
       <p:sp>
         <p:nvSpPr>
-          <p:cNvPr id="8" name="사진 자리"/>
+          <p:cNvPr id="10" name="사진 자리"/>
           <p:cNvSpPr/>
           <p:nvPr/>
         </p:nvSpPr>
         <p:spPr>
           <a:xfrm>
-            <a:off x="4368698" y="4000500"/>
-            <a:ext cx="3454298" cy="2217420"/>
+            <a:off x="4338218" y="4160520"/>
+            <a:ext cx="3515258" cy="2194560"/>
           </a:xfrm>
           <a:prstGeom prst="roundRect">
             <a:avLst>
@@ -5693,12 +6118,10 @@
             </a:avLst>
           </a:prstGeom>
           <a:solidFill>
-            <a:srgbClr val="D1FADC"/>
+            <a:srgbClr val="FAF1D1"/>
           </a:solidFill>
           <a:ln w="19050">
-            <a:solidFill>
-              <a:srgbClr val="26C54E"/>
-            </a:solidFill>
+            <a:noFill/>
             <a:prstDash val="dash"/>
           </a:ln>
         </p:spPr>
@@ -5716,7 +6139,7 @@
             <a:r>
               <a:rPr sz="1200" b="0" i="0">
                 <a:solidFill>
-                  <a:srgbClr val="115F25"/>
+                  <a:srgbClr val="8E8780"/>
                 </a:solidFill>
               </a:rPr>
               <a:t>사진 5</a:t>
@@ -5726,14 +6149,14 @@
       </p:sp>
       <p:sp>
         <p:nvSpPr>
-          <p:cNvPr id="9" name="사진 자리"/>
+          <p:cNvPr id="11" name="사진 자리"/>
           <p:cNvSpPr/>
           <p:nvPr/>
         </p:nvSpPr>
         <p:spPr>
           <a:xfrm>
-            <a:off x="8005876" y="4000500"/>
-            <a:ext cx="3454298" cy="2217420"/>
+            <a:off x="8036356" y="4160520"/>
+            <a:ext cx="3515258" cy="2194560"/>
           </a:xfrm>
           <a:prstGeom prst="roundRect">
             <a:avLst>
@@ -5741,12 +6164,10 @@
             </a:avLst>
           </a:prstGeom>
           <a:solidFill>
-            <a:srgbClr val="D1FADC"/>
+            <a:srgbClr val="FAF1D1"/>
           </a:solidFill>
           <a:ln w="19050">
-            <a:solidFill>
-              <a:srgbClr val="26C54E"/>
-            </a:solidFill>
+            <a:noFill/>
             <a:prstDash val="dash"/>
           </a:ln>
         </p:spPr>
@@ -5764,7 +6185,7 @@
             <a:r>
               <a:rPr sz="1200" b="0" i="0">
                 <a:solidFill>
-                  <a:srgbClr val="115F25"/>
+                  <a:srgbClr val="8E8780"/>
                 </a:solidFill>
               </a:rPr>
               <a:t>사진 6</a:t>
@@ -5783,6 +6204,14 @@
 <file path=ppt/slides/slide6.xml><?xml version="1.0" encoding="utf-8"?>
 <p:sld xmlns:a="http://schemas.openxmlformats.org/drawingml/2006/main" xmlns:p="http://schemas.openxmlformats.org/presentationml/2006/main" xmlns:r="http://schemas.openxmlformats.org/officeDocument/2006/relationships">
   <p:cSld>
+    <p:bg>
+      <p:bgPr>
+        <a:solidFill>
+          <a:srgbClr val="FDF8EA"/>
+        </a:solidFill>
+        <a:effectLst/>
+      </p:bgPr>
+    </p:bg>
     <p:spTree>
       <p:nvGrpSpPr>
         <p:cNvPr id="1" name=""/>
@@ -5790,30 +6219,116 @@
         <p:nvPr/>
       </p:nvGrpSpPr>
       <p:grpSpPr/>
-      <p:pic>
-        <p:nvPicPr>
-          <p:cNvPr id="3" name="표지 그림" descr="family-17.jpg"/>
-          <p:cNvPicPr>
-            <a:picLocks noChangeAspect="1"/>
-          </p:cNvPicPr>
-          <p:nvPr/>
-        </p:nvPicPr>
-        <p:blipFill>
-          <a:blip r:embed="rId2"/>
-          <a:stretch>
-            <a:fillRect/>
-          </a:stretch>
-        </p:blipFill>
+      <p:sp>
+        <p:nvSpPr>
+          <p:cNvPr id="3" name="사진 자리"/>
+          <p:cNvSpPr/>
+          <p:nvPr/>
+        </p:nvSpPr>
         <p:spPr>
           <a:xfrm>
             <a:off x="0" y="0"/>
-            <a:ext cx="12191695" cy="6858000"/>
+            <a:ext cx="4389010" cy="6858000"/>
           </a:xfrm>
           <a:prstGeom prst="rect">
             <a:avLst/>
           </a:prstGeom>
-        </p:spPr>
-      </p:pic>
+          <a:solidFill>
+            <a:srgbClr val="F3E1A5"/>
+          </a:solidFill>
+          <a:ln>
+            <a:noFill/>
+          </a:ln>
+        </p:spPr>
+        <p:txBody>
+          <a:bodyPr rtlCol="0" anchor="ctr" wrap="square" lIns="54864" rIns="54864" tIns="27432" bIns="27432">
+            <a:noAutofit/>
+          </a:bodyPr>
+          <a:lstStyle/>
+          <a:p>
+            <a:pPr algn="ctr">
+              <a:lnSpc>
+                <a:spcPct val="100000"/>
+              </a:lnSpc>
+            </a:pPr>
+            <a:r>
+              <a:rPr sz="1400" b="0" i="0">
+                <a:solidFill>
+                  <a:srgbClr val="494127"/>
+                </a:solidFill>
+              </a:rPr>
+              <a:t>사진을 넣어 주세요</a:t>
+            </a:r>
+          </a:p>
+        </p:txBody>
+      </p:sp>
+      <p:sp>
+        <p:nvSpPr>
+          <p:cNvPr id="4" name="장식"/>
+          <p:cNvSpPr/>
+          <p:nvPr/>
+        </p:nvSpPr>
+        <p:spPr>
+          <a:xfrm>
+            <a:off x="365750" y="365760"/>
+            <a:ext cx="3657508" cy="6126480"/>
+          </a:xfrm>
+          <a:prstGeom prst="rect">
+            <a:avLst/>
+          </a:prstGeom>
+          <a:noFill/>
+          <a:ln w="9525">
+            <a:solidFill>
+              <a:srgbClr val="26231F"/>
+            </a:solidFill>
+          </a:ln>
+        </p:spPr>
+        <p:txBody>
+          <a:bodyPr rtlCol="0" anchor="ctr"/>
+          <a:lstStyle/>
+          <a:p>
+            <a:pPr algn="ctr"/>
+          </a:p>
+        </p:txBody>
+      </p:sp>
+      <p:sp>
+        <p:nvSpPr>
+          <p:cNvPr id="5" name="라벨"/>
+          <p:cNvSpPr txBox="1"/>
+          <p:nvPr/>
+        </p:nvSpPr>
+        <p:spPr>
+          <a:xfrm>
+            <a:off x="6827349" y="2148840"/>
+            <a:ext cx="4632844" cy="274320"/>
+          </a:xfrm>
+          <a:prstGeom prst="rect">
+            <a:avLst/>
+          </a:prstGeom>
+          <a:noFill/>
+        </p:spPr>
+        <p:txBody>
+          <a:bodyPr wrap="square" lIns="54864" rIns="54864" tIns="27432" bIns="27432" anchor="t">
+            <a:noAutofit/>
+          </a:bodyPr>
+          <a:lstStyle/>
+          <a:p>
+            <a:pPr algn="l">
+              <a:lnSpc>
+                <a:spcPct val="115000"/>
+              </a:lnSpc>
+            </a:pPr>
+            <a:r>
+              <a:rPr sz="1000" b="1" i="0" spc="250">
+                <a:solidFill>
+                  <a:srgbClr val="26231F"/>
+                </a:solidFill>
+              </a:rPr>
+              <a:t>FAMILY ALBUM</a:t>
+            </a:r>
+          </a:p>
+        </p:txBody>
+      </p:sp>
       <p:sp>
         <p:nvSpPr>
           <p:cNvPr id="2" name="Title 1"/>
@@ -5826,8 +6341,8 @@
         </p:nvSpPr>
         <p:spPr>
           <a:xfrm>
-            <a:off x="853418" y="2057400"/>
-            <a:ext cx="6095847" cy="1554480"/>
+            <a:off x="6827349" y="2606040"/>
+            <a:ext cx="4632844" cy="1188720"/>
           </a:xfrm>
         </p:spPr>
         <p:txBody>
@@ -5842,9 +6357,9 @@
               </a:lnSpc>
             </a:pPr>
             <a:r>
-              <a:rPr sz="3600" b="1" i="0">
-                <a:solidFill>
-                  <a:srgbClr val="115F25"/>
+              <a:rPr sz="4000" b="1" i="0">
+                <a:solidFill>
+                  <a:srgbClr val="26231F"/>
                 </a:solidFill>
               </a:rPr>
               <a:t>우리 가족 소개를 마칩니다</a:t>
@@ -5854,14 +6369,14 @@
       </p:sp>
       <p:sp>
         <p:nvSpPr>
-          <p:cNvPr id="4" name="한 줄 문구"/>
+          <p:cNvPr id="6" name="한 줄 문구"/>
           <p:cNvSpPr txBox="1"/>
           <p:nvPr/>
         </p:nvSpPr>
         <p:spPr>
           <a:xfrm>
-            <a:off x="853418" y="3749039"/>
-            <a:ext cx="6095847" cy="822960"/>
+            <a:off x="6827349" y="3886200"/>
+            <a:ext cx="4632844" cy="822960"/>
           </a:xfrm>
           <a:prstGeom prst="rect">
             <a:avLst/>
@@ -5880,9 +6395,9 @@
               </a:lnSpc>
             </a:pPr>
             <a:r>
-              <a:rPr sz="1700" b="0" i="1">
-                <a:solidFill>
-                  <a:srgbClr val="115F25"/>
+              <a:rPr sz="1700" b="0" i="0">
+                <a:solidFill>
+                  <a:srgbClr val="26231F"/>
                 </a:solidFill>
               </a:rPr>
               <a:t>읽어 주셔서 고맙습니다</a:t>
@@ -5892,14 +6407,14 @@
       </p:sp>
       <p:sp>
         <p:nvSpPr>
-          <p:cNvPr id="5" name="안내 문구"/>
+          <p:cNvPr id="7" name="안내 문구"/>
           <p:cNvSpPr txBox="1"/>
           <p:nvPr/>
         </p:nvSpPr>
         <p:spPr>
           <a:xfrm>
-            <a:off x="853418" y="4617720"/>
-            <a:ext cx="6095847" cy="914400"/>
+            <a:off x="6827349" y="4754880"/>
+            <a:ext cx="4632844" cy="914400"/>
           </a:xfrm>
           <a:prstGeom prst="rect">
             <a:avLst/>
@@ -5920,7 +6435,7 @@
             <a:r>
               <a:rPr sz="1400" b="0" i="0">
                 <a:solidFill>
-                  <a:srgbClr val="666666"/>
+                  <a:srgbClr val="26231F"/>
                 </a:solidFill>
               </a:rPr>
               <a:t>고맙습니다 · 가족 이름</a:t>
@@ -5947,34 +6462,34 @@
         <a:sysClr val="window" lastClr="FFFFFF"/>
       </a:lt1>
       <a:dk2>
-        <a:srgbClr val="115F25"/>
+        <a:srgbClr val="494127"/>
       </a:dk2>
       <a:lt2>
-        <a:srgbClr val="EEFCF1"/>
+        <a:srgbClr val="FDF8EA"/>
       </a:lt2>
       <a:accent1>
-        <a:srgbClr val="26C54E"/>
+        <a:srgbClr val="EAD07B"/>
       </a:accent1>
       <a:accent2>
-        <a:srgbClr val="209DB6"/>
+        <a:srgbClr val="DCEF9F"/>
       </a:accent2>
       <a:accent3>
-        <a:srgbClr val="115F25"/>
+        <a:srgbClr val="494127"/>
       </a:accent3>
       <a:accent4>
-        <a:srgbClr val="D1FADC"/>
+        <a:srgbClr val="FAF1D1"/>
       </a:accent4>
       <a:accent5>
-        <a:srgbClr val="23B182"/>
+        <a:srgbClr val="E3E08D"/>
       </a:accent5>
       <a:accent6>
-        <a:srgbClr val="709F7C"/>
+        <a:srgbClr val="928D7D"/>
       </a:accent6>
       <a:hlink>
-        <a:srgbClr val="26C54E"/>
+        <a:srgbClr val="EAD07B"/>
       </a:hlink>
       <a:folHlink>
-        <a:srgbClr val="115F25"/>
+        <a:srgbClr val="494127"/>
       </a:folHlink>
     </a:clrScheme>
     <a:fontScheme name="Office">
